--- a/gcc-atlas/deck/GCC-Atlas-Flexiple-Assignment.pptx
+++ b/gcc-atlas/deck/GCC-Atlas-Flexiple-Assignment.pptx
@@ -23,6 +23,7 @@
     <p:sldId id="271" r:id="rId22"/>
     <p:sldId id="272" r:id="rId23"/>
     <p:sldId id="273" r:id="rId24"/>
+    <p:sldId id="274" r:id="rId25"/>
   </p:sldIdLst>
   <p:sldSz cx="12191695" cy="6858000" type="screen4x3"/>
   <p:notesSz cx="6858000" cy="9144000"/>
@@ -8093,7 +8094,7 @@
                 </a:solidFill>
                 <a:latin typeface="Calibri"/>
               </a:rPr>
-              <a:t>HONESTY</a:t>
+              <a:t>POSITIONING</a:t>
             </a:r>
           </a:p>
         </p:txBody>
@@ -8132,13 +8133,13 @@
               </a:spcAft>
             </a:pPr>
             <a:r>
-              <a:rPr sz="3200" b="0" i="0">
+              <a:rPr sz="2900" b="0" i="0">
                 <a:solidFill>
                   <a:srgbClr val="1A1A1A"/>
                 </a:solidFill>
                 <a:latin typeface="Georgia"/>
               </a:rPr>
-              <a:t>What is not true about this yet</a:t>
+              <a:t>What it would take to serve the rest of the ecosystem</a:t>
             </a:r>
           </a:p>
         </p:txBody>
@@ -8177,13 +8178,13 @@
               </a:spcAft>
             </a:pPr>
             <a:r>
-              <a:rPr sz="1450" b="0" i="0">
+              <a:rPr sz="1350" b="0" i="0">
                 <a:solidFill>
                   <a:srgbClr val="4A4845"/>
                 </a:solidFill>
                 <a:latin typeface="Calibri"/>
               </a:rPr>
-              <a:t>Stated here rather than discovered later. The product repeats all of this on its own Sources &amp; Method page.</a:t>
+              <a:t>I built for one stakeholder on purpose. Here is what each of the others would need before this is worth their time — and which of those I can honestly serve today.</a:t>
             </a:r>
           </a:p>
         </p:txBody>
@@ -8196,7 +8197,7 @@
         </p:nvSpPr>
         <p:spPr>
           <a:xfrm>
-            <a:off x="713232" y="2121408"/>
+            <a:off x="713232" y="2139696"/>
             <a:ext cx="10765231" cy="11430"/>
           </a:xfrm>
           <a:prstGeom prst="rect">
@@ -8234,20 +8235,200 @@
       </p:sp>
       <p:sp>
         <p:nvSpPr>
-          <p:cNvPr id="7" name="Rectangle 6"/>
+          <p:cNvPr id="7" name="TextBox 6"/>
+          <p:cNvSpPr txBox="1"/>
+          <p:nvPr/>
+        </p:nvSpPr>
+        <p:spPr>
+          <a:xfrm>
+            <a:off x="713232" y="2304288"/>
+            <a:ext cx="2286000" cy="228600"/>
+          </a:xfrm>
+          <a:prstGeom prst="rect">
+            <a:avLst/>
+          </a:prstGeom>
+          <a:noFill/>
+        </p:spPr>
+        <p:txBody>
+          <a:bodyPr wrap="square" lIns="0" rIns="0" tIns="0" bIns="0" anchor="t">
+            <a:spAutoFit/>
+          </a:bodyPr>
+          <a:lstStyle/>
+          <a:p>
+            <a:pPr algn="l">
+              <a:lnSpc>
+                <a:spcPct val="135000"/>
+              </a:lnSpc>
+              <a:spcBef>
+                <a:spcPts val="0"/>
+              </a:spcBef>
+              <a:spcAft>
+                <a:spcPts val="0"/>
+              </a:spcAft>
+            </a:pPr>
+            <a:r>
+              <a:rPr sz="950" b="1" i="0">
+                <a:solidFill>
+                  <a:srgbClr val="7A7772"/>
+                </a:solidFill>
+                <a:latin typeface="Calibri"/>
+              </a:rPr>
+              <a:t>STAKEHOLDER</a:t>
+            </a:r>
+          </a:p>
+        </p:txBody>
+      </p:sp>
+      <p:sp>
+        <p:nvSpPr>
+          <p:cNvPr id="8" name="TextBox 7"/>
+          <p:cNvSpPr txBox="1"/>
+          <p:nvPr/>
+        </p:nvSpPr>
+        <p:spPr>
+          <a:xfrm>
+            <a:off x="3108960" y="2304288"/>
+            <a:ext cx="2743200" cy="228600"/>
+          </a:xfrm>
+          <a:prstGeom prst="rect">
+            <a:avLst/>
+          </a:prstGeom>
+          <a:noFill/>
+        </p:spPr>
+        <p:txBody>
+          <a:bodyPr wrap="square" lIns="0" rIns="0" tIns="0" bIns="0" anchor="t">
+            <a:spAutoFit/>
+          </a:bodyPr>
+          <a:lstStyle/>
+          <a:p>
+            <a:pPr algn="l">
+              <a:lnSpc>
+                <a:spcPct val="135000"/>
+              </a:lnSpc>
+              <a:spcBef>
+                <a:spcPts val="0"/>
+              </a:spcBef>
+              <a:spcAft>
+                <a:spcPts val="0"/>
+              </a:spcAft>
+            </a:pPr>
+            <a:r>
+              <a:rPr sz="950" b="1" i="0">
+                <a:solidFill>
+                  <a:srgbClr val="7A7772"/>
+                </a:solidFill>
+                <a:latin typeface="Calibri"/>
+              </a:rPr>
+              <a:t>WHAT THEY USE TODAY</a:t>
+            </a:r>
+          </a:p>
+        </p:txBody>
+      </p:sp>
+      <p:sp>
+        <p:nvSpPr>
+          <p:cNvPr id="9" name="TextBox 8"/>
+          <p:cNvSpPr txBox="1"/>
+          <p:nvPr/>
+        </p:nvSpPr>
+        <p:spPr>
+          <a:xfrm>
+            <a:off x="5961888" y="2304288"/>
+            <a:ext cx="3931920" cy="228600"/>
+          </a:xfrm>
+          <a:prstGeom prst="rect">
+            <a:avLst/>
+          </a:prstGeom>
+          <a:noFill/>
+        </p:spPr>
+        <p:txBody>
+          <a:bodyPr wrap="square" lIns="0" rIns="0" tIns="0" bIns="0" anchor="t">
+            <a:spAutoFit/>
+          </a:bodyPr>
+          <a:lstStyle/>
+          <a:p>
+            <a:pPr algn="l">
+              <a:lnSpc>
+                <a:spcPct val="135000"/>
+              </a:lnSpc>
+              <a:spcBef>
+                <a:spcPts val="0"/>
+              </a:spcBef>
+              <a:spcAft>
+                <a:spcPts val="0"/>
+              </a:spcAft>
+            </a:pPr>
+            <a:r>
+              <a:rPr sz="950" b="1" i="0">
+                <a:solidFill>
+                  <a:srgbClr val="7A7772"/>
+                </a:solidFill>
+                <a:latin typeface="Calibri"/>
+              </a:rPr>
+              <a:t>WHAT THEY WOULD NEED FROM THIS</a:t>
+            </a:r>
+          </a:p>
+        </p:txBody>
+      </p:sp>
+      <p:sp>
+        <p:nvSpPr>
+          <p:cNvPr id="10" name="TextBox 9"/>
+          <p:cNvSpPr txBox="1"/>
+          <p:nvPr/>
+        </p:nvSpPr>
+        <p:spPr>
+          <a:xfrm>
+            <a:off x="10003536" y="2304288"/>
+            <a:ext cx="1371600" cy="228600"/>
+          </a:xfrm>
+          <a:prstGeom prst="rect">
+            <a:avLst/>
+          </a:prstGeom>
+          <a:noFill/>
+        </p:spPr>
+        <p:txBody>
+          <a:bodyPr wrap="square" lIns="0" rIns="0" tIns="0" bIns="0" anchor="t">
+            <a:spAutoFit/>
+          </a:bodyPr>
+          <a:lstStyle/>
+          <a:p>
+            <a:pPr algn="l">
+              <a:lnSpc>
+                <a:spcPct val="135000"/>
+              </a:lnSpc>
+              <a:spcBef>
+                <a:spcPts val="0"/>
+              </a:spcBef>
+              <a:spcAft>
+                <a:spcPts val="0"/>
+              </a:spcAft>
+            </a:pPr>
+            <a:r>
+              <a:rPr sz="950" b="1" i="0">
+                <a:solidFill>
+                  <a:srgbClr val="7A7772"/>
+                </a:solidFill>
+                <a:latin typeface="Calibri"/>
+              </a:rPr>
+              <a:t>STATUS</a:t>
+            </a:r>
+          </a:p>
+        </p:txBody>
+      </p:sp>
+      <p:sp>
+        <p:nvSpPr>
+          <p:cNvPr id="11" name="Rectangle 10"/>
           <p:cNvSpPr/>
           <p:nvPr/>
         </p:nvSpPr>
         <p:spPr>
           <a:xfrm>
-            <a:off x="713232" y="2395728"/>
-            <a:ext cx="33020" cy="658368"/>
+            <a:off x="713232" y="2578608"/>
+            <a:ext cx="10765231" cy="11430"/>
           </a:xfrm>
           <a:prstGeom prst="rect">
             <a:avLst/>
           </a:prstGeom>
           <a:solidFill>
-            <a:srgbClr val="7D3B36"/>
+            <a:srgbClr val="E2DED7"/>
           </a:solidFill>
           <a:ln>
             <a:noFill/>
@@ -8278,14 +8459,14 @@
       </p:sp>
       <p:sp>
         <p:nvSpPr>
-          <p:cNvPr id="8" name="TextBox 7"/>
-          <p:cNvSpPr txBox="1"/>
-          <p:nvPr/>
-        </p:nvSpPr>
-        <p:spPr>
-          <a:xfrm>
-            <a:off x="914400" y="2395728"/>
-            <a:ext cx="10564063" cy="658368"/>
+          <p:cNvPr id="12" name="TextBox 11"/>
+          <p:cNvSpPr txBox="1"/>
+          <p:nvPr/>
+        </p:nvSpPr>
+        <p:spPr>
+          <a:xfrm>
+            <a:off x="713232" y="2706624"/>
+            <a:ext cx="2286000" cy="548640"/>
           </a:xfrm>
           <a:prstGeom prst="rect">
             <a:avLst/>
@@ -8300,65 +8481,133 @@
           <a:p>
             <a:pPr algn="l">
               <a:lnSpc>
-                <a:spcPct val="135000"/>
-              </a:lnSpc>
-              <a:spcBef>
-                <a:spcPts val="0"/>
-              </a:spcBef>
-              <a:spcAft>
-                <a:spcPts val="300"/>
-              </a:spcAft>
-            </a:pPr>
-            <a:r>
-              <a:rPr sz="1250" b="1" i="0">
+                <a:spcPct val="125000"/>
+              </a:lnSpc>
+              <a:spcBef>
+                <a:spcPts val="0"/>
+              </a:spcBef>
+              <a:spcAft>
+                <a:spcPts val="0"/>
+              </a:spcAft>
+            </a:pPr>
+            <a:r>
+              <a:rPr sz="1100" b="1" i="0">
                 <a:solidFill>
                   <a:srgbClr val="1A1A1A"/>
                 </a:solidFill>
                 <a:latin typeface="Calibri"/>
               </a:rPr>
-              <a:t>The source links are not yet confirmed first-hand</a:t>
-            </a:r>
-          </a:p>
-          <a:p>
-            <a:pPr>
-              <a:lnSpc>
-                <a:spcPct val="133000"/>
-              </a:lnSpc>
-              <a:spcBef>
-                <a:spcPts val="0"/>
-              </a:spcBef>
-              <a:spcAft>
-                <a:spcPts val="600"/>
-              </a:spcAft>
-            </a:pPr>
-            <a:r>
-              <a:rPr sz="1100" b="0" i="0">
-                <a:solidFill>
-                  <a:srgbClr val="4A4845"/>
-                </a:solidFill>
-                <a:latin typeface="Calibri"/>
-              </a:rPr>
-              <a:t>I identified them through search. The build environment blocked opening pages directly, so each link still needs to be read and confirmed. The app ships a Verify checklist for exactly this, and nothing should be presented as fact until that is done.</a:t>
-            </a:r>
-          </a:p>
-        </p:txBody>
-      </p:sp>
-      <p:sp>
-        <p:nvSpPr>
-          <p:cNvPr id="9" name="Rectangle 8"/>
+              <a:t>Recruitment &amp; staffing</a:t>
+            </a:r>
+          </a:p>
+        </p:txBody>
+      </p:sp>
+      <p:sp>
+        <p:nvSpPr>
+          <p:cNvPr id="13" name="TextBox 12"/>
+          <p:cNvSpPr txBox="1"/>
+          <p:nvPr/>
+        </p:nvSpPr>
+        <p:spPr>
+          <a:xfrm>
+            <a:off x="3108960" y="2706624"/>
+            <a:ext cx="2743200" cy="548640"/>
+          </a:xfrm>
+          <a:prstGeom prst="rect">
+            <a:avLst/>
+          </a:prstGeom>
+          <a:noFill/>
+        </p:spPr>
+        <p:txBody>
+          <a:bodyPr wrap="square" lIns="0" rIns="0" tIns="0" bIns="0" anchor="t">
+            <a:spAutoFit/>
+          </a:bodyPr>
+          <a:lstStyle/>
+          <a:p>
+            <a:pPr algn="l">
+              <a:lnSpc>
+                <a:spcPct val="128000"/>
+              </a:lnSpc>
+              <a:spcBef>
+                <a:spcPts val="0"/>
+              </a:spcBef>
+              <a:spcAft>
+                <a:spcPts val="0"/>
+              </a:spcAft>
+            </a:pPr>
+            <a:r>
+              <a:rPr sz="1050" b="0" i="0">
+                <a:solidFill>
+                  <a:srgbClr val="7A7772"/>
+                </a:solidFill>
+                <a:latin typeface="Calibri"/>
+              </a:rPr>
+              <a:t>News, referrals, generic sales tools</a:t>
+            </a:r>
+          </a:p>
+        </p:txBody>
+      </p:sp>
+      <p:sp>
+        <p:nvSpPr>
+          <p:cNvPr id="14" name="TextBox 13"/>
+          <p:cNvSpPr txBox="1"/>
+          <p:nvPr/>
+        </p:nvSpPr>
+        <p:spPr>
+          <a:xfrm>
+            <a:off x="5961888" y="2706624"/>
+            <a:ext cx="3931920" cy="548640"/>
+          </a:xfrm>
+          <a:prstGeom prst="rect">
+            <a:avLst/>
+          </a:prstGeom>
+          <a:noFill/>
+        </p:spPr>
+        <p:txBody>
+          <a:bodyPr wrap="square" lIns="0" rIns="0" tIns="0" bIns="0" anchor="t">
+            <a:spAutoFit/>
+          </a:bodyPr>
+          <a:lstStyle/>
+          <a:p>
+            <a:pPr algn="l">
+              <a:lnSpc>
+                <a:spcPct val="128000"/>
+              </a:lnSpc>
+              <a:spcBef>
+                <a:spcPts val="0"/>
+              </a:spcBef>
+              <a:spcAft>
+                <a:spcPts val="0"/>
+              </a:spcAft>
+            </a:pPr>
+            <a:r>
+              <a:rPr sz="1050" b="0" i="0">
+                <a:solidFill>
+                  <a:srgbClr val="1A1A1A"/>
+                </a:solidFill>
+                <a:latin typeface="Calibri"/>
+              </a:rPr>
+              <a:t>Dated, cited, per-company activity they can check before acting</a:t>
+            </a:r>
+          </a:p>
+        </p:txBody>
+      </p:sp>
+      <p:sp>
+        <p:nvSpPr>
+          <p:cNvPr id="15" name="Rectangle 14"/>
           <p:cNvSpPr/>
           <p:nvPr/>
         </p:nvSpPr>
         <p:spPr>
           <a:xfrm>
-            <a:off x="713232" y="3182112"/>
-            <a:ext cx="33020" cy="658368"/>
+            <a:off x="10003536" y="2688336"/>
+            <a:ext cx="1371600" cy="237744"/>
           </a:xfrm>
           <a:prstGeom prst="rect">
             <a:avLst/>
           </a:prstGeom>
           <a:solidFill>
-            <a:srgbClr val="7D3B36"/>
+            <a:srgbClr val="E8F1ED"/>
           </a:solidFill>
           <a:ln>
             <a:noFill/>
@@ -8380,23 +8629,32 @@
           </a:fontRef>
         </p:style>
         <p:txBody>
-          <a:bodyPr rtlCol="0" anchor="ctr"/>
+          <a:bodyPr rtlCol="0" anchor="ctr" lIns="64008" rIns="64008" tIns="0" bIns="0"/>
           <a:lstStyle/>
           <a:p>
             <a:pPr algn="ctr"/>
-          </a:p>
-        </p:txBody>
-      </p:sp>
-      <p:sp>
-        <p:nvSpPr>
-          <p:cNvPr id="10" name="TextBox 9"/>
-          <p:cNvSpPr txBox="1"/>
-          <p:nvPr/>
-        </p:nvSpPr>
-        <p:spPr>
-          <a:xfrm>
-            <a:off x="914400" y="3182112"/>
-            <a:ext cx="10564063" cy="658368"/>
+            <a:r>
+              <a:rPr sz="950" b="1">
+                <a:solidFill>
+                  <a:srgbClr val="1D5C43"/>
+                </a:solidFill>
+                <a:latin typeface="Calibri"/>
+              </a:rPr>
+              <a:t>Serving now</a:t>
+            </a:r>
+          </a:p>
+        </p:txBody>
+      </p:sp>
+      <p:sp>
+        <p:nvSpPr>
+          <p:cNvPr id="16" name="TextBox 15"/>
+          <p:cNvSpPr txBox="1"/>
+          <p:nvPr/>
+        </p:nvSpPr>
+        <p:spPr>
+          <a:xfrm>
+            <a:off x="713232" y="3209544"/>
+            <a:ext cx="2286000" cy="548640"/>
           </a:xfrm>
           <a:prstGeom prst="rect">
             <a:avLst/>
@@ -8411,65 +8669,133 @@
           <a:p>
             <a:pPr algn="l">
               <a:lnSpc>
-                <a:spcPct val="135000"/>
-              </a:lnSpc>
-              <a:spcBef>
-                <a:spcPts val="0"/>
-              </a:spcBef>
-              <a:spcAft>
-                <a:spcPts val="300"/>
-              </a:spcAft>
-            </a:pPr>
-            <a:r>
-              <a:rPr sz="1250" b="1" i="0">
+                <a:spcPct val="125000"/>
+              </a:lnSpc>
+              <a:spcBef>
+                <a:spcPts val="0"/>
+              </a:spcBef>
+              <a:spcAft>
+                <a:spcPts val="0"/>
+              </a:spcAft>
+            </a:pPr>
+            <a:r>
+              <a:rPr sz="1100" b="1" i="0">
                 <a:solidFill>
                   <a:srgbClr val="1A1A1A"/>
                 </a:solidFill>
                 <a:latin typeface="Calibri"/>
               </a:rPr>
-              <a:t>No user research exists</a:t>
-            </a:r>
-          </a:p>
-          <a:p>
-            <a:pPr>
-              <a:lnSpc>
-                <a:spcPct val="133000"/>
-              </a:lnSpc>
-              <a:spcBef>
-                <a:spcPts val="0"/>
-              </a:spcBef>
-              <a:spcAft>
-                <a:spcPts val="600"/>
-              </a:spcAft>
-            </a:pPr>
-            <a:r>
-              <a:rPr sz="1100" b="0" i="0">
-                <a:solidFill>
-                  <a:srgbClr val="4A4845"/>
-                </a:solidFill>
-                <a:latin typeface="Calibri"/>
-              </a:rPr>
-              <a:t>I have not interviewed a single recruitment or staffing professional. Every statement about what they need is my reasoning, not a finding. The alternatives slide marks which claims I tested myself and which I assumed.</a:t>
-            </a:r>
-          </a:p>
-        </p:txBody>
-      </p:sp>
-      <p:sp>
-        <p:nvSpPr>
-          <p:cNvPr id="11" name="Rectangle 10"/>
+              <a:t>Advisors &amp; consultants</a:t>
+            </a:r>
+          </a:p>
+        </p:txBody>
+      </p:sp>
+      <p:sp>
+        <p:nvSpPr>
+          <p:cNvPr id="17" name="TextBox 16"/>
+          <p:cNvSpPr txBox="1"/>
+          <p:nvPr/>
+        </p:nvSpPr>
+        <p:spPr>
+          <a:xfrm>
+            <a:off x="3108960" y="3209544"/>
+            <a:ext cx="2743200" cy="548640"/>
+          </a:xfrm>
+          <a:prstGeom prst="rect">
+            <a:avLst/>
+          </a:prstGeom>
+          <a:noFill/>
+        </p:spPr>
+        <p:txBody>
+          <a:bodyPr wrap="square" lIns="0" rIns="0" tIns="0" bIns="0" anchor="t">
+            <a:spAutoFit/>
+          </a:bodyPr>
+          <a:lstStyle/>
+          <a:p>
+            <a:pPr algn="l">
+              <a:lnSpc>
+                <a:spcPct val="128000"/>
+              </a:lnSpc>
+              <a:spcBef>
+                <a:spcPts val="0"/>
+              </a:spcBef>
+              <a:spcAft>
+                <a:spcPts val="0"/>
+              </a:spcAft>
+            </a:pPr>
+            <a:r>
+              <a:rPr sz="1050" b="0" i="0">
+                <a:solidFill>
+                  <a:srgbClr val="7A7772"/>
+                </a:solidFill>
+                <a:latin typeface="Calibri"/>
+              </a:rPr>
+              <a:t>Their own networks; subscription research</a:t>
+            </a:r>
+          </a:p>
+        </p:txBody>
+      </p:sp>
+      <p:sp>
+        <p:nvSpPr>
+          <p:cNvPr id="18" name="TextBox 17"/>
+          <p:cNvSpPr txBox="1"/>
+          <p:nvPr/>
+        </p:nvSpPr>
+        <p:spPr>
+          <a:xfrm>
+            <a:off x="5961888" y="3209544"/>
+            <a:ext cx="3931920" cy="548640"/>
+          </a:xfrm>
+          <a:prstGeom prst="rect">
+            <a:avLst/>
+          </a:prstGeom>
+          <a:noFill/>
+        </p:spPr>
+        <p:txBody>
+          <a:bodyPr wrap="square" lIns="0" rIns="0" tIns="0" bIns="0" anchor="t">
+            <a:spAutoFit/>
+          </a:bodyPr>
+          <a:lstStyle/>
+          <a:p>
+            <a:pPr algn="l">
+              <a:lnSpc>
+                <a:spcPct val="128000"/>
+              </a:lnSpc>
+              <a:spcBef>
+                <a:spcPts val="0"/>
+              </a:spcBef>
+              <a:spcAft>
+                <a:spcPts val="0"/>
+              </a:spcAft>
+            </a:pPr>
+            <a:r>
+              <a:rPr sz="1050" b="0" i="0">
+                <a:solidFill>
+                  <a:srgbClr val="1A1A1A"/>
+                </a:solidFill>
+                <a:latin typeface="Calibri"/>
+              </a:rPr>
+              <a:t>Same record, plus who is at MoU stage rather than already committed</a:t>
+            </a:r>
+          </a:p>
+        </p:txBody>
+      </p:sp>
+      <p:sp>
+        <p:nvSpPr>
+          <p:cNvPr id="19" name="Rectangle 18"/>
           <p:cNvSpPr/>
           <p:nvPr/>
         </p:nvSpPr>
         <p:spPr>
           <a:xfrm>
-            <a:off x="713232" y="3968496"/>
-            <a:ext cx="33020" cy="658368"/>
+            <a:off x="10003536" y="3191256"/>
+            <a:ext cx="1371600" cy="237744"/>
           </a:xfrm>
           <a:prstGeom prst="rect">
             <a:avLst/>
           </a:prstGeom>
           <a:solidFill>
-            <a:srgbClr val="7A5618"/>
+            <a:srgbClr val="E8F1ED"/>
           </a:solidFill>
           <a:ln>
             <a:noFill/>
@@ -8491,23 +8817,32 @@
           </a:fontRef>
         </p:style>
         <p:txBody>
-          <a:bodyPr rtlCol="0" anchor="ctr"/>
+          <a:bodyPr rtlCol="0" anchor="ctr" lIns="64008" rIns="64008" tIns="0" bIns="0"/>
           <a:lstStyle/>
           <a:p>
             <a:pPr algn="ctr"/>
-          </a:p>
-        </p:txBody>
-      </p:sp>
-      <p:sp>
-        <p:nvSpPr>
-          <p:cNvPr id="12" name="TextBox 11"/>
-          <p:cNvSpPr txBox="1"/>
-          <p:nvPr/>
-        </p:nvSpPr>
-        <p:spPr>
-          <a:xfrm>
-            <a:off x="914400" y="3968496"/>
-            <a:ext cx="10564063" cy="658368"/>
+            <a:r>
+              <a:rPr sz="950" b="1">
+                <a:solidFill>
+                  <a:srgbClr val="1D5C43"/>
+                </a:solidFill>
+                <a:latin typeface="Calibri"/>
+              </a:rPr>
+              <a:t>Serving now</a:t>
+            </a:r>
+          </a:p>
+        </p:txBody>
+      </p:sp>
+      <p:sp>
+        <p:nvSpPr>
+          <p:cNvPr id="20" name="TextBox 19"/>
+          <p:cNvSpPr txBox="1"/>
+          <p:nvPr/>
+        </p:nvSpPr>
+        <p:spPr>
+          <a:xfrm>
+            <a:off x="713232" y="3712464"/>
+            <a:ext cx="2286000" cy="548640"/>
           </a:xfrm>
           <a:prstGeom prst="rect">
             <a:avLst/>
@@ -8522,65 +8857,133 @@
           <a:p>
             <a:pPr algn="l">
               <a:lnSpc>
-                <a:spcPct val="135000"/>
-              </a:lnSpc>
-              <a:spcBef>
-                <a:spcPts val="0"/>
-              </a:spcBef>
-              <a:spcAft>
-                <a:spcPts val="300"/>
-              </a:spcAft>
-            </a:pPr>
-            <a:r>
-              <a:rPr sz="1250" b="1" i="0">
+                <a:spcPct val="125000"/>
+              </a:lnSpc>
+              <a:spcBef>
+                <a:spcPts val="0"/>
+              </a:spcBef>
+              <a:spcAft>
+                <a:spcPts val="0"/>
+              </a:spcAft>
+            </a:pPr>
+            <a:r>
+              <a:rPr sz="1100" b="1" i="0">
                 <a:solidFill>
                   <a:srgbClr val="1A1A1A"/>
                 </a:solidFill>
                 <a:latin typeface="Calibri"/>
               </a:rPr>
-              <a:t>20 records is a sample, not a market</a:t>
-            </a:r>
-          </a:p>
-          <a:p>
-            <a:pPr>
-              <a:lnSpc>
-                <a:spcPct val="133000"/>
-              </a:lnSpc>
-              <a:spcBef>
-                <a:spcPts val="0"/>
-              </a:spcBef>
-              <a:spcAft>
-                <a:spcPts val="600"/>
-              </a:spcAft>
-            </a:pPr>
-            <a:r>
-              <a:rPr sz="1100" b="0" i="0">
-                <a:solidFill>
-                  <a:srgbClr val="4A4845"/>
-                </a:solidFill>
-                <a:latin typeface="Calibri"/>
-              </a:rPr>
-              <a:t>Coverage is skewed toward cities and states with active press communications. A count here measures reporting volume, not real activity.</a:t>
-            </a:r>
-          </a:p>
-        </p:txBody>
-      </p:sp>
-      <p:sp>
-        <p:nvSpPr>
-          <p:cNvPr id="13" name="Rectangle 12"/>
+              <a:t>Real estate firms</a:t>
+            </a:r>
+          </a:p>
+        </p:txBody>
+      </p:sp>
+      <p:sp>
+        <p:nvSpPr>
+          <p:cNvPr id="21" name="TextBox 20"/>
+          <p:cNvSpPr txBox="1"/>
+          <p:nvPr/>
+        </p:nvSpPr>
+        <p:spPr>
+          <a:xfrm>
+            <a:off x="3108960" y="3712464"/>
+            <a:ext cx="2743200" cy="548640"/>
+          </a:xfrm>
+          <a:prstGeom prst="rect">
+            <a:avLst/>
+          </a:prstGeom>
+          <a:noFill/>
+        </p:spPr>
+        <p:txBody>
+          <a:bodyPr wrap="square" lIns="0" rIns="0" tIns="0" bIns="0" anchor="t">
+            <a:spAutoFit/>
+          </a:bodyPr>
+          <a:lstStyle/>
+          <a:p>
+            <a:pPr algn="l">
+              <a:lnSpc>
+                <a:spcPct val="128000"/>
+              </a:lnSpc>
+              <a:spcBef>
+                <a:spcPts val="0"/>
+              </a:spcBef>
+              <a:spcAft>
+                <a:spcPts val="0"/>
+              </a:spcAft>
+            </a:pPr>
+            <a:r>
+              <a:rPr sz="1050" b="0" i="0">
+                <a:solidFill>
+                  <a:srgbClr val="7A7772"/>
+                </a:solidFill>
+                <a:latin typeface="Calibri"/>
+              </a:rPr>
+              <a:t>Leasing data they already hold</a:t>
+            </a:r>
+          </a:p>
+        </p:txBody>
+      </p:sp>
+      <p:sp>
+        <p:nvSpPr>
+          <p:cNvPr id="22" name="TextBox 21"/>
+          <p:cNvSpPr txBox="1"/>
+          <p:nvPr/>
+        </p:nvSpPr>
+        <p:spPr>
+          <a:xfrm>
+            <a:off x="5961888" y="3712464"/>
+            <a:ext cx="3931920" cy="548640"/>
+          </a:xfrm>
+          <a:prstGeom prst="rect">
+            <a:avLst/>
+          </a:prstGeom>
+          <a:noFill/>
+        </p:spPr>
+        <p:txBody>
+          <a:bodyPr wrap="square" lIns="0" rIns="0" tIns="0" bIns="0" anchor="t">
+            <a:spAutoFit/>
+          </a:bodyPr>
+          <a:lstStyle/>
+          <a:p>
+            <a:pPr algn="l">
+              <a:lnSpc>
+                <a:spcPct val="128000"/>
+              </a:lnSpc>
+              <a:spcBef>
+                <a:spcPts val="0"/>
+              </a:spcBef>
+              <a:spcAft>
+                <a:spcPts val="0"/>
+              </a:spcAft>
+            </a:pPr>
+            <a:r>
+              <a:rPr sz="1050" b="0" i="0">
+                <a:solidFill>
+                  <a:srgbClr val="1A1A1A"/>
+                </a:solidFill>
+                <a:latin typeface="Calibri"/>
+              </a:rPr>
+              <a:t>The reverse view — intent signals that precede a space requirement</a:t>
+            </a:r>
+          </a:p>
+        </p:txBody>
+      </p:sp>
+      <p:sp>
+        <p:nvSpPr>
+          <p:cNvPr id="23" name="Rectangle 22"/>
           <p:cNvSpPr/>
           <p:nvPr/>
         </p:nvSpPr>
         <p:spPr>
           <a:xfrm>
-            <a:off x="713232" y="4754880"/>
-            <a:ext cx="33020" cy="658368"/>
+            <a:off x="10003536" y="3694176"/>
+            <a:ext cx="1371600" cy="237744"/>
           </a:xfrm>
           <a:prstGeom prst="rect">
             <a:avLst/>
           </a:prstGeom>
           <a:solidFill>
-            <a:srgbClr val="7A5618"/>
+            <a:srgbClr val="E8F1ED"/>
           </a:solidFill>
           <a:ln>
             <a:noFill/>
@@ -8602,23 +9005,32 @@
           </a:fontRef>
         </p:style>
         <p:txBody>
-          <a:bodyPr rtlCol="0" anchor="ctr"/>
+          <a:bodyPr rtlCol="0" anchor="ctr" lIns="64008" rIns="64008" tIns="0" bIns="0"/>
           <a:lstStyle/>
           <a:p>
             <a:pPr algn="ctr"/>
-          </a:p>
-        </p:txBody>
-      </p:sp>
-      <p:sp>
-        <p:nvSpPr>
-          <p:cNvPr id="14" name="TextBox 13"/>
-          <p:cNvSpPr txBox="1"/>
-          <p:nvPr/>
-        </p:nvSpPr>
-        <p:spPr>
-          <a:xfrm>
-            <a:off x="914400" y="4754880"/>
-            <a:ext cx="10564063" cy="658368"/>
+            <a:r>
+              <a:rPr sz="950" b="1">
+                <a:solidFill>
+                  <a:srgbClr val="1D5C43"/>
+                </a:solidFill>
+                <a:latin typeface="Calibri"/>
+              </a:rPr>
+              <a:t>Mostly today</a:t>
+            </a:r>
+          </a:p>
+        </p:txBody>
+      </p:sp>
+      <p:sp>
+        <p:nvSpPr>
+          <p:cNvPr id="24" name="TextBox 23"/>
+          <p:cNvSpPr txBox="1"/>
+          <p:nvPr/>
+        </p:nvSpPr>
+        <p:spPr>
+          <a:xfrm>
+            <a:off x="713232" y="4215384"/>
+            <a:ext cx="2286000" cy="548640"/>
           </a:xfrm>
           <a:prstGeom prst="rect">
             <a:avLst/>
@@ -8633,65 +9045,133 @@
           <a:p>
             <a:pPr algn="l">
               <a:lnSpc>
-                <a:spcPct val="135000"/>
-              </a:lnSpc>
-              <a:spcBef>
-                <a:spcPts val="0"/>
-              </a:spcBef>
-              <a:spcAft>
-                <a:spcPts val="300"/>
-              </a:spcAft>
-            </a:pPr>
-            <a:r>
-              <a:rPr sz="1250" b="1" i="0">
+                <a:spcPct val="125000"/>
+              </a:lnSpc>
+              <a:spcBef>
+                <a:spcPts val="0"/>
+              </a:spcBef>
+              <a:spcAft>
+                <a:spcPts val="0"/>
+              </a:spcAft>
+            </a:pPr>
+            <a:r>
+              <a:rPr sz="1100" b="1" i="0">
                 <a:solidFill>
                   <a:srgbClr val="1A1A1A"/>
                 </a:solidFill>
                 <a:latin typeface="Calibri"/>
               </a:rPr>
-              <a:t>It cannot predict, and does not try</a:t>
-            </a:r>
-          </a:p>
-          <a:p>
-            <a:pPr>
-              <a:lnSpc>
-                <a:spcPct val="133000"/>
-              </a:lnSpc>
-              <a:spcBef>
-                <a:spcPts val="0"/>
-              </a:spcBef>
-              <a:spcAft>
-                <a:spcPts val="600"/>
-              </a:spcAft>
-            </a:pPr>
-            <a:r>
-              <a:rPr sz="1100" b="0" i="0">
-                <a:solidFill>
-                  <a:srgbClr val="4A4845"/>
-                </a:solidFill>
-                <a:latin typeface="Calibri"/>
-              </a:rPr>
-              <a:t>I looked for evidence that public signals give reliable early warning of GCC setups. I did not find enough to support that claim, so the product does not make it.</a:t>
-            </a:r>
-          </a:p>
-        </p:txBody>
-      </p:sp>
-      <p:sp>
-        <p:nvSpPr>
-          <p:cNvPr id="15" name="Rectangle 14"/>
+              <a:t>State promotion agencies</a:t>
+            </a:r>
+          </a:p>
+        </p:txBody>
+      </p:sp>
+      <p:sp>
+        <p:nvSpPr>
+          <p:cNvPr id="25" name="TextBox 24"/>
+          <p:cNvSpPr txBox="1"/>
+          <p:nvPr/>
+        </p:nvSpPr>
+        <p:spPr>
+          <a:xfrm>
+            <a:off x="3108960" y="4215384"/>
+            <a:ext cx="2743200" cy="548640"/>
+          </a:xfrm>
+          <a:prstGeom prst="rect">
+            <a:avLst/>
+          </a:prstGeom>
+          <a:noFill/>
+        </p:spPr>
+        <p:txBody>
+          <a:bodyPr wrap="square" lIns="0" rIns="0" tIns="0" bIns="0" anchor="t">
+            <a:spAutoFit/>
+          </a:bodyPr>
+          <a:lstStyle/>
+          <a:p>
+            <a:pPr algn="l">
+              <a:lnSpc>
+                <a:spcPct val="128000"/>
+              </a:lnSpc>
+              <a:spcBef>
+                <a:spcPts val="0"/>
+              </a:spcBef>
+              <a:spcAft>
+                <a:spcPts val="0"/>
+              </a:spcAft>
+            </a:pPr>
+            <a:r>
+              <a:rPr sz="1050" b="0" i="0">
+                <a:solidFill>
+                  <a:srgbClr val="7A7772"/>
+                </a:solidFill>
+                <a:latin typeface="Calibri"/>
+              </a:rPr>
+              <a:t>Their own pipeline; press monitoring</a:t>
+            </a:r>
+          </a:p>
+        </p:txBody>
+      </p:sp>
+      <p:sp>
+        <p:nvSpPr>
+          <p:cNvPr id="26" name="TextBox 25"/>
+          <p:cNvSpPr txBox="1"/>
+          <p:nvPr/>
+        </p:nvSpPr>
+        <p:spPr>
+          <a:xfrm>
+            <a:off x="5961888" y="4215384"/>
+            <a:ext cx="3931920" cy="548640"/>
+          </a:xfrm>
+          <a:prstGeom prst="rect">
+            <a:avLst/>
+          </a:prstGeom>
+          <a:noFill/>
+        </p:spPr>
+        <p:txBody>
+          <a:bodyPr wrap="square" lIns="0" rIns="0" tIns="0" bIns="0" anchor="t">
+            <a:spAutoFit/>
+          </a:bodyPr>
+          <a:lstStyle/>
+          <a:p>
+            <a:pPr algn="l">
+              <a:lnSpc>
+                <a:spcPct val="128000"/>
+              </a:lnSpc>
+              <a:spcBef>
+                <a:spcPts val="0"/>
+              </a:spcBef>
+              <a:spcAft>
+                <a:spcPts val="0"/>
+              </a:spcAft>
+            </a:pPr>
+            <a:r>
+              <a:rPr sz="1050" b="0" i="0">
+                <a:solidFill>
+                  <a:srgbClr val="1A1A1A"/>
+                </a:solidFill>
+                <a:latin typeface="Calibri"/>
+              </a:rPr>
+              <a:t>A neutral record of what peer states are winning, with sources</a:t>
+            </a:r>
+          </a:p>
+        </p:txBody>
+      </p:sp>
+      <p:sp>
+        <p:nvSpPr>
+          <p:cNvPr id="27" name="Rectangle 26"/>
           <p:cNvSpPr/>
           <p:nvPr/>
         </p:nvSpPr>
         <p:spPr>
           <a:xfrm>
-            <a:off x="713232" y="5541264"/>
-            <a:ext cx="33020" cy="658368"/>
+            <a:off x="10003536" y="4197096"/>
+            <a:ext cx="1371600" cy="237744"/>
           </a:xfrm>
           <a:prstGeom prst="rect">
             <a:avLst/>
           </a:prstGeom>
           <a:solidFill>
-            <a:srgbClr val="7A5618"/>
+            <a:srgbClr val="F7F0E2"/>
           </a:solidFill>
           <a:ln>
             <a:noFill/>
@@ -8713,6 +9193,437 @@
           </a:fontRef>
         </p:style>
         <p:txBody>
+          <a:bodyPr rtlCol="0" anchor="ctr" lIns="64008" rIns="64008" tIns="0" bIns="0"/>
+          <a:lstStyle/>
+          <a:p>
+            <a:pPr algn="ctr"/>
+            <a:r>
+              <a:rPr sz="950" b="1">
+                <a:solidFill>
+                  <a:srgbClr val="7A5618"/>
+                </a:solidFill>
+                <a:latin typeface="Calibri"/>
+              </a:rPr>
+              <a:t>Needs coverage</a:t>
+            </a:r>
+          </a:p>
+        </p:txBody>
+      </p:sp>
+      <p:sp>
+        <p:nvSpPr>
+          <p:cNvPr id="28" name="TextBox 27"/>
+          <p:cNvSpPr txBox="1"/>
+          <p:nvPr/>
+        </p:nvSpPr>
+        <p:spPr>
+          <a:xfrm>
+            <a:off x="713232" y="4718304"/>
+            <a:ext cx="2286000" cy="548640"/>
+          </a:xfrm>
+          <a:prstGeom prst="rect">
+            <a:avLst/>
+          </a:prstGeom>
+          <a:noFill/>
+        </p:spPr>
+        <p:txBody>
+          <a:bodyPr wrap="square" lIns="0" rIns="0" tIns="0" bIns="0" anchor="t">
+            <a:spAutoFit/>
+          </a:bodyPr>
+          <a:lstStyle/>
+          <a:p>
+            <a:pPr algn="l">
+              <a:lnSpc>
+                <a:spcPct val="125000"/>
+              </a:lnSpc>
+              <a:spcBef>
+                <a:spcPts val="0"/>
+              </a:spcBef>
+              <a:spcAft>
+                <a:spcPts val="0"/>
+              </a:spcAft>
+            </a:pPr>
+            <a:r>
+              <a:rPr sz="1100" b="1" i="0">
+                <a:solidFill>
+                  <a:srgbClr val="1A1A1A"/>
+                </a:solidFill>
+                <a:latin typeface="Calibri"/>
+              </a:rPr>
+              <a:t>Companies setting up a GCC</a:t>
+            </a:r>
+          </a:p>
+        </p:txBody>
+      </p:sp>
+      <p:sp>
+        <p:nvSpPr>
+          <p:cNvPr id="29" name="TextBox 28"/>
+          <p:cNvSpPr txBox="1"/>
+          <p:nvPr/>
+        </p:nvSpPr>
+        <p:spPr>
+          <a:xfrm>
+            <a:off x="3108960" y="4718304"/>
+            <a:ext cx="2743200" cy="548640"/>
+          </a:xfrm>
+          <a:prstGeom prst="rect">
+            <a:avLst/>
+          </a:prstGeom>
+          <a:noFill/>
+        </p:spPr>
+        <p:txBody>
+          <a:bodyPr wrap="square" lIns="0" rIns="0" tIns="0" bIns="0" anchor="t">
+            <a:spAutoFit/>
+          </a:bodyPr>
+          <a:lstStyle/>
+          <a:p>
+            <a:pPr algn="l">
+              <a:lnSpc>
+                <a:spcPct val="128000"/>
+              </a:lnSpc>
+              <a:spcBef>
+                <a:spcPts val="0"/>
+              </a:spcBef>
+              <a:spcAft>
+                <a:spcPts val="0"/>
+              </a:spcAft>
+            </a:pPr>
+            <a:r>
+              <a:rPr sz="1050" b="0" i="0">
+                <a:solidFill>
+                  <a:srgbClr val="7A7772"/>
+                </a:solidFill>
+                <a:latin typeface="Calibri"/>
+              </a:rPr>
+              <a:t>Advisors, who are themselves conflicted</a:t>
+            </a:r>
+          </a:p>
+        </p:txBody>
+      </p:sp>
+      <p:sp>
+        <p:nvSpPr>
+          <p:cNvPr id="30" name="TextBox 29"/>
+          <p:cNvSpPr txBox="1"/>
+          <p:nvPr/>
+        </p:nvSpPr>
+        <p:spPr>
+          <a:xfrm>
+            <a:off x="5961888" y="4718304"/>
+            <a:ext cx="3931920" cy="548640"/>
+          </a:xfrm>
+          <a:prstGeom prst="rect">
+            <a:avLst/>
+          </a:prstGeom>
+          <a:noFill/>
+        </p:spPr>
+        <p:txBody>
+          <a:bodyPr wrap="square" lIns="0" rIns="0" tIns="0" bIns="0" anchor="t">
+            <a:spAutoFit/>
+          </a:bodyPr>
+          <a:lstStyle/>
+          <a:p>
+            <a:pPr algn="l">
+              <a:lnSpc>
+                <a:spcPct val="128000"/>
+              </a:lnSpc>
+              <a:spcBef>
+                <a:spcPts val="0"/>
+              </a:spcBef>
+              <a:spcAft>
+                <a:spcPts val="0"/>
+              </a:spcAft>
+            </a:pPr>
+            <a:r>
+              <a:rPr sz="1050" b="0" i="0">
+                <a:solidFill>
+                  <a:srgbClr val="1A1A1A"/>
+                </a:solidFill>
+                <a:latin typeface="Calibri"/>
+              </a:rPr>
+              <a:t>Verified cost, incentive and provider data — none of which I hold</a:t>
+            </a:r>
+          </a:p>
+        </p:txBody>
+      </p:sp>
+      <p:sp>
+        <p:nvSpPr>
+          <p:cNvPr id="31" name="Rectangle 30"/>
+          <p:cNvSpPr/>
+          <p:nvPr/>
+        </p:nvSpPr>
+        <p:spPr>
+          <a:xfrm>
+            <a:off x="10003536" y="4700016"/>
+            <a:ext cx="1371600" cy="237744"/>
+          </a:xfrm>
+          <a:prstGeom prst="rect">
+            <a:avLst/>
+          </a:prstGeom>
+          <a:solidFill>
+            <a:srgbClr val="F8ECEB"/>
+          </a:solidFill>
+          <a:ln>
+            <a:noFill/>
+          </a:ln>
+          <a:effectLst/>
+        </p:spPr>
+        <p:style>
+          <a:lnRef idx="1">
+            <a:schemeClr val="accent1"/>
+          </a:lnRef>
+          <a:fillRef idx="3">
+            <a:schemeClr val="accent1"/>
+          </a:fillRef>
+          <a:effectRef idx="2">
+            <a:schemeClr val="accent1"/>
+          </a:effectRef>
+          <a:fontRef idx="minor">
+            <a:schemeClr val="lt1"/>
+          </a:fontRef>
+        </p:style>
+        <p:txBody>
+          <a:bodyPr rtlCol="0" anchor="ctr" lIns="64008" rIns="64008" tIns="0" bIns="0"/>
+          <a:lstStyle/>
+          <a:p>
+            <a:pPr algn="ctr"/>
+            <a:r>
+              <a:rPr sz="950" b="1">
+                <a:solidFill>
+                  <a:srgbClr val="7D3B36"/>
+                </a:solidFill>
+                <a:latin typeface="Calibri"/>
+              </a:rPr>
+              <a:t>Not yet</a:t>
+            </a:r>
+          </a:p>
+        </p:txBody>
+      </p:sp>
+      <p:sp>
+        <p:nvSpPr>
+          <p:cNvPr id="32" name="TextBox 31"/>
+          <p:cNvSpPr txBox="1"/>
+          <p:nvPr/>
+        </p:nvSpPr>
+        <p:spPr>
+          <a:xfrm>
+            <a:off x="713232" y="5221224"/>
+            <a:ext cx="2286000" cy="548640"/>
+          </a:xfrm>
+          <a:prstGeom prst="rect">
+            <a:avLst/>
+          </a:prstGeom>
+          <a:noFill/>
+        </p:spPr>
+        <p:txBody>
+          <a:bodyPr wrap="square" lIns="0" rIns="0" tIns="0" bIns="0" anchor="t">
+            <a:spAutoFit/>
+          </a:bodyPr>
+          <a:lstStyle/>
+          <a:p>
+            <a:pPr algn="l">
+              <a:lnSpc>
+                <a:spcPct val="125000"/>
+              </a:lnSpc>
+              <a:spcBef>
+                <a:spcPts val="0"/>
+              </a:spcBef>
+              <a:spcAft>
+                <a:spcPts val="0"/>
+              </a:spcAft>
+            </a:pPr>
+            <a:r>
+              <a:rPr sz="1100" b="1" i="0">
+                <a:solidFill>
+                  <a:srgbClr val="1A1A1A"/>
+                </a:solidFill>
+                <a:latin typeface="Calibri"/>
+              </a:rPr>
+              <a:t>EOR &amp; legal providers</a:t>
+            </a:r>
+          </a:p>
+        </p:txBody>
+      </p:sp>
+      <p:sp>
+        <p:nvSpPr>
+          <p:cNvPr id="33" name="TextBox 32"/>
+          <p:cNvSpPr txBox="1"/>
+          <p:nvPr/>
+        </p:nvSpPr>
+        <p:spPr>
+          <a:xfrm>
+            <a:off x="3108960" y="5221224"/>
+            <a:ext cx="2743200" cy="548640"/>
+          </a:xfrm>
+          <a:prstGeom prst="rect">
+            <a:avLst/>
+          </a:prstGeom>
+          <a:noFill/>
+        </p:spPr>
+        <p:txBody>
+          <a:bodyPr wrap="square" lIns="0" rIns="0" tIns="0" bIns="0" anchor="t">
+            <a:spAutoFit/>
+          </a:bodyPr>
+          <a:lstStyle/>
+          <a:p>
+            <a:pPr algn="l">
+              <a:lnSpc>
+                <a:spcPct val="128000"/>
+              </a:lnSpc>
+              <a:spcBef>
+                <a:spcPts val="0"/>
+              </a:spcBef>
+              <a:spcAft>
+                <a:spcPts val="0"/>
+              </a:spcAft>
+            </a:pPr>
+            <a:r>
+              <a:rPr sz="1050" b="0" i="0">
+                <a:solidFill>
+                  <a:srgbClr val="7A7772"/>
+                </a:solidFill>
+                <a:latin typeface="Calibri"/>
+              </a:rPr>
+              <a:t>Referrals</a:t>
+            </a:r>
+          </a:p>
+        </p:txBody>
+      </p:sp>
+      <p:sp>
+        <p:nvSpPr>
+          <p:cNvPr id="34" name="TextBox 33"/>
+          <p:cNvSpPr txBox="1"/>
+          <p:nvPr/>
+        </p:nvSpPr>
+        <p:spPr>
+          <a:xfrm>
+            <a:off x="5961888" y="5221224"/>
+            <a:ext cx="3931920" cy="548640"/>
+          </a:xfrm>
+          <a:prstGeom prst="rect">
+            <a:avLst/>
+          </a:prstGeom>
+          <a:noFill/>
+        </p:spPr>
+        <p:txBody>
+          <a:bodyPr wrap="square" lIns="0" rIns="0" tIns="0" bIns="0" anchor="t">
+            <a:spAutoFit/>
+          </a:bodyPr>
+          <a:lstStyle/>
+          <a:p>
+            <a:pPr algn="l">
+              <a:lnSpc>
+                <a:spcPct val="128000"/>
+              </a:lnSpc>
+              <a:spcBef>
+                <a:spcPts val="0"/>
+              </a:spcBef>
+              <a:spcAft>
+                <a:spcPts val="0"/>
+              </a:spcAft>
+            </a:pPr>
+            <a:r>
+              <a:rPr sz="1050" b="0" i="0">
+                <a:solidFill>
+                  <a:srgbClr val="1A1A1A"/>
+                </a:solidFill>
+                <a:latin typeface="Calibri"/>
+              </a:rPr>
+              <a:t>Entity-level data tying each centre to its Indian legal entity</a:t>
+            </a:r>
+          </a:p>
+        </p:txBody>
+      </p:sp>
+      <p:sp>
+        <p:nvSpPr>
+          <p:cNvPr id="35" name="Rectangle 34"/>
+          <p:cNvSpPr/>
+          <p:nvPr/>
+        </p:nvSpPr>
+        <p:spPr>
+          <a:xfrm>
+            <a:off x="10003536" y="5202936"/>
+            <a:ext cx="1371600" cy="237744"/>
+          </a:xfrm>
+          <a:prstGeom prst="rect">
+            <a:avLst/>
+          </a:prstGeom>
+          <a:solidFill>
+            <a:srgbClr val="F8ECEB"/>
+          </a:solidFill>
+          <a:ln>
+            <a:noFill/>
+          </a:ln>
+          <a:effectLst/>
+        </p:spPr>
+        <p:style>
+          <a:lnRef idx="1">
+            <a:schemeClr val="accent1"/>
+          </a:lnRef>
+          <a:fillRef idx="3">
+            <a:schemeClr val="accent1"/>
+          </a:fillRef>
+          <a:effectRef idx="2">
+            <a:schemeClr val="accent1"/>
+          </a:effectRef>
+          <a:fontRef idx="minor">
+            <a:schemeClr val="lt1"/>
+          </a:fontRef>
+        </p:style>
+        <p:txBody>
+          <a:bodyPr rtlCol="0" anchor="ctr" lIns="64008" rIns="64008" tIns="0" bIns="0"/>
+          <a:lstStyle/>
+          <a:p>
+            <a:pPr algn="ctr"/>
+            <a:r>
+              <a:rPr sz="950" b="1">
+                <a:solidFill>
+                  <a:srgbClr val="7D3B36"/>
+                </a:solidFill>
+                <a:latin typeface="Calibri"/>
+              </a:rPr>
+              <a:t>Not yet</a:t>
+            </a:r>
+          </a:p>
+        </p:txBody>
+      </p:sp>
+      <p:sp>
+        <p:nvSpPr>
+          <p:cNvPr id="36" name="Rectangle 35"/>
+          <p:cNvSpPr/>
+          <p:nvPr/>
+        </p:nvSpPr>
+        <p:spPr>
+          <a:xfrm>
+            <a:off x="713232" y="5724144"/>
+            <a:ext cx="10765231" cy="603504"/>
+          </a:xfrm>
+          <a:prstGeom prst="rect">
+            <a:avLst/>
+          </a:prstGeom>
+          <a:solidFill>
+            <a:srgbClr val="F7F0E2"/>
+          </a:solidFill>
+          <a:ln w="11430">
+            <a:solidFill>
+              <a:srgbClr val="E6D7B6"/>
+            </a:solidFill>
+          </a:ln>
+          <a:effectLst/>
+        </p:spPr>
+        <p:style>
+          <a:lnRef idx="1">
+            <a:schemeClr val="accent1"/>
+          </a:lnRef>
+          <a:fillRef idx="3">
+            <a:schemeClr val="accent1"/>
+          </a:fillRef>
+          <a:effectRef idx="2">
+            <a:schemeClr val="accent1"/>
+          </a:effectRef>
+          <a:fontRef idx="minor">
+            <a:schemeClr val="lt1"/>
+          </a:fontRef>
+        </p:style>
+        <p:txBody>
           <a:bodyPr rtlCol="0" anchor="ctr"/>
           <a:lstStyle/>
           <a:p>
@@ -8722,14 +9633,14 @@
       </p:sp>
       <p:sp>
         <p:nvSpPr>
-          <p:cNvPr id="16" name="TextBox 15"/>
-          <p:cNvSpPr txBox="1"/>
-          <p:nvPr/>
-        </p:nvSpPr>
-        <p:spPr>
-          <a:xfrm>
-            <a:off x="914400" y="5541264"/>
-            <a:ext cx="10564063" cy="658368"/>
+          <p:cNvPr id="37" name="TextBox 36"/>
+          <p:cNvSpPr txBox="1"/>
+          <p:nvPr/>
+        </p:nvSpPr>
+        <p:spPr>
+          <a:xfrm>
+            <a:off x="914400" y="5833872"/>
+            <a:ext cx="10362895" cy="420624"/>
           </a:xfrm>
           <a:prstGeom prst="rect">
             <a:avLst/>
@@ -8744,52 +9655,36 @@
           <a:p>
             <a:pPr algn="l">
               <a:lnSpc>
-                <a:spcPct val="135000"/>
-              </a:lnSpc>
-              <a:spcBef>
-                <a:spcPts val="0"/>
-              </a:spcBef>
-              <a:spcAft>
-                <a:spcPts val="300"/>
-              </a:spcAft>
-            </a:pPr>
-            <a:r>
-              <a:rPr sz="1250" b="1" i="0">
-                <a:solidFill>
-                  <a:srgbClr val="1A1A1A"/>
-                </a:solidFill>
-                <a:latin typeface="Calibri"/>
-              </a:rPr>
-              <a:t>"Ask" is keyword search, not AI</a:t>
-            </a:r>
-          </a:p>
-          <a:p>
-            <a:pPr>
-              <a:lnSpc>
-                <a:spcPct val="133000"/>
-              </a:lnSpc>
-              <a:spcBef>
-                <a:spcPts val="0"/>
-              </a:spcBef>
+                <a:spcPct val="130000"/>
+              </a:lnSpc>
               <a:spcAft>
                 <a:spcPts val="600"/>
               </a:spcAft>
             </a:pPr>
             <a:r>
-              <a:rPr sz="1100" b="0" i="0">
+              <a:rPr sz="1100" b="1">
+                <a:solidFill>
+                  <a:srgbClr val="7A5618"/>
+                </a:solidFill>
+                <a:latin typeface="Calibri"/>
+              </a:rPr>
+              <a:t>On sizing the problem: </a:t>
+            </a:r>
+            <a:r>
+              <a:rPr sz="1100" b="0">
                 <a:solidFill>
                   <a:srgbClr val="4A4845"/>
                 </a:solidFill>
                 <a:latin typeface="Calibri"/>
               </a:rPr>
-              <a:t>It scores records by word overlap and detects a few patterns. The app says so on the page itself. No model, no API key, no cost.</a:t>
-            </a:r>
-          </a:p>
-        </p:txBody>
-      </p:sp>
-      <p:sp>
-        <p:nvSpPr>
-          <p:cNvPr id="17" name="TextBox 16"/>
+              <a:t>I could not find a credible public figure for what this asymmetry costs, and I will not invent one. Measuring it means asking firms how many opportunities they learn about too late — the first thing I would test.</a:t>
+            </a:r>
+          </a:p>
+        </p:txBody>
+      </p:sp>
+      <p:sp>
+        <p:nvSpPr>
+          <p:cNvPr id="38" name="TextBox 37"/>
           <p:cNvSpPr txBox="1"/>
           <p:nvPr/>
         </p:nvSpPr>
@@ -8833,14 +9728,14 @@
                 </a:solidFill>
                 <a:latin typeface="Calibri"/>
               </a:rPr>
-              <a:t>   ·   Limitations &amp; assumptions</a:t>
-            </a:r>
-          </a:p>
-        </p:txBody>
-      </p:sp>
-      <p:sp>
-        <p:nvSpPr>
-          <p:cNvPr id="18" name="TextBox 17"/>
+              <a:t>   ·   Positioning · Other stakeholders</a:t>
+            </a:r>
+          </a:p>
+        </p:txBody>
+      </p:sp>
+      <p:sp>
+        <p:nvSpPr>
+          <p:cNvPr id="39" name="TextBox 38"/>
           <p:cNvSpPr txBox="1"/>
           <p:nvPr/>
         </p:nvSpPr>
@@ -8985,7 +9880,7 @@
                 </a:solidFill>
                 <a:latin typeface="Calibri"/>
               </a:rPr>
-              <a:t>NEXT</a:t>
+              <a:t>HONESTY</a:t>
             </a:r>
           </a:p>
         </p:txBody>
@@ -9030,20 +9925,65 @@
                 </a:solidFill>
                 <a:latin typeface="Georgia"/>
               </a:rPr>
-              <a:t>What I would do next, in order</a:t>
-            </a:r>
-          </a:p>
-        </p:txBody>
-      </p:sp>
-      <p:sp>
-        <p:nvSpPr>
-          <p:cNvPr id="5" name="Rectangle 4"/>
+              <a:t>What is not true about this yet</a:t>
+            </a:r>
+          </a:p>
+        </p:txBody>
+      </p:sp>
+      <p:sp>
+        <p:nvSpPr>
+          <p:cNvPr id="5" name="TextBox 4"/>
+          <p:cNvSpPr txBox="1"/>
+          <p:nvPr/>
+        </p:nvSpPr>
+        <p:spPr>
+          <a:xfrm>
+            <a:off x="713232" y="1517904"/>
+            <a:ext cx="8778240" cy="640080"/>
+          </a:xfrm>
+          <a:prstGeom prst="rect">
+            <a:avLst/>
+          </a:prstGeom>
+          <a:noFill/>
+        </p:spPr>
+        <p:txBody>
+          <a:bodyPr wrap="square" lIns="0" rIns="0" tIns="0" bIns="0" anchor="t">
+            <a:spAutoFit/>
+          </a:bodyPr>
+          <a:lstStyle/>
+          <a:p>
+            <a:pPr algn="l">
+              <a:lnSpc>
+                <a:spcPct val="140000"/>
+              </a:lnSpc>
+              <a:spcBef>
+                <a:spcPts val="0"/>
+              </a:spcBef>
+              <a:spcAft>
+                <a:spcPts val="0"/>
+              </a:spcAft>
+            </a:pPr>
+            <a:r>
+              <a:rPr sz="1450" b="0" i="0">
+                <a:solidFill>
+                  <a:srgbClr val="4A4845"/>
+                </a:solidFill>
+                <a:latin typeface="Calibri"/>
+              </a:rPr>
+              <a:t>Stated here rather than discovered later. The product repeats all of this on its own Sources &amp; Method page.</a:t>
+            </a:r>
+          </a:p>
+        </p:txBody>
+      </p:sp>
+      <p:sp>
+        <p:nvSpPr>
+          <p:cNvPr id="6" name="Rectangle 5"/>
           <p:cNvSpPr/>
           <p:nvPr/>
         </p:nvSpPr>
         <p:spPr>
           <a:xfrm>
-            <a:off x="713232" y="1426464"/>
+            <a:off x="713232" y="2121408"/>
             <a:ext cx="10765231" cy="11430"/>
           </a:xfrm>
           <a:prstGeom prst="rect">
@@ -9081,20 +10021,20 @@
       </p:sp>
       <p:sp>
         <p:nvSpPr>
-          <p:cNvPr id="6" name="Oval 5"/>
+          <p:cNvPr id="7" name="Rectangle 6"/>
           <p:cNvSpPr/>
           <p:nvPr/>
         </p:nvSpPr>
         <p:spPr>
           <a:xfrm>
-            <a:off x="713232" y="1837944"/>
-            <a:ext cx="329184" cy="329184"/>
-          </a:xfrm>
-          <a:prstGeom prst="ellipse">
+            <a:off x="713232" y="2395728"/>
+            <a:ext cx="33020" cy="658368"/>
+          </a:xfrm>
+          <a:prstGeom prst="rect">
             <a:avLst/>
           </a:prstGeom>
           <a:solidFill>
-            <a:srgbClr val="1F3A5F"/>
+            <a:srgbClr val="7D3B36"/>
           </a:solidFill>
           <a:ln>
             <a:noFill/>
@@ -9116,32 +10056,23 @@
           </a:fontRef>
         </p:style>
         <p:txBody>
-          <a:bodyPr rtlCol="0" anchor="ctr" lIns="0" rIns="0" tIns="0" bIns="0"/>
+          <a:bodyPr rtlCol="0" anchor="ctr"/>
           <a:lstStyle/>
           <a:p>
             <a:pPr algn="ctr"/>
-            <a:r>
-              <a:rPr sz="1200" b="1">
-                <a:solidFill>
-                  <a:srgbClr val="FFFFFF"/>
-                </a:solidFill>
-                <a:latin typeface="Calibri"/>
-              </a:rPr>
-              <a:t>1</a:t>
-            </a:r>
-          </a:p>
-        </p:txBody>
-      </p:sp>
-      <p:sp>
-        <p:nvSpPr>
-          <p:cNvPr id="7" name="TextBox 6"/>
-          <p:cNvSpPr txBox="1"/>
-          <p:nvPr/>
-        </p:nvSpPr>
-        <p:spPr>
-          <a:xfrm>
-            <a:off x="1207008" y="1783080"/>
-            <a:ext cx="8412480" cy="731520"/>
+          </a:p>
+        </p:txBody>
+      </p:sp>
+      <p:sp>
+        <p:nvSpPr>
+          <p:cNvPr id="8" name="TextBox 7"/>
+          <p:cNvSpPr txBox="1"/>
+          <p:nvPr/>
+        </p:nvSpPr>
+        <p:spPr>
+          <a:xfrm>
+            <a:off x="914400" y="2395728"/>
+            <a:ext cx="10564063" cy="658368"/>
           </a:xfrm>
           <a:prstGeom prst="rect">
             <a:avLst/>
@@ -9166,19 +10097,19 @@
               </a:spcAft>
             </a:pPr>
             <a:r>
-              <a:rPr sz="1350" b="1" i="0">
+              <a:rPr sz="1250" b="1" i="0">
                 <a:solidFill>
                   <a:srgbClr val="1A1A1A"/>
                 </a:solidFill>
                 <a:latin typeface="Calibri"/>
               </a:rPr>
-              <a:t>Confirm all 47 sources</a:t>
+              <a:t>The source links are not yet confirmed first-hand</a:t>
             </a:r>
           </a:p>
           <a:p>
             <a:pPr>
               <a:lnSpc>
-                <a:spcPct val="135000"/>
+                <a:spcPct val="133000"/>
               </a:lnSpc>
               <a:spcBef>
                 <a:spcPts val="0"/>
@@ -9188,33 +10119,33 @@
               </a:spcAft>
             </a:pPr>
             <a:r>
-              <a:rPr sz="1150" b="0" i="0">
+              <a:rPr sz="1100" b="0" i="0">
                 <a:solidFill>
                   <a:srgbClr val="4A4845"/>
                 </a:solidFill>
                 <a:latin typeface="Calibri"/>
               </a:rPr>
-              <a:t>Open every link, confirm it supports the record, log who checked it and when. Nothing else matters until this is done.</a:t>
-            </a:r>
-          </a:p>
-        </p:txBody>
-      </p:sp>
-      <p:sp>
-        <p:nvSpPr>
-          <p:cNvPr id="8" name="Rectangle 7"/>
+              <a:t>I identified them through search. The build environment blocked opening pages directly, so each link still needs to be read and confirmed. The app ships a Verify checklist for exactly this, and nothing should be presented as fact until that is done.</a:t>
+            </a:r>
+          </a:p>
+        </p:txBody>
+      </p:sp>
+      <p:sp>
+        <p:nvSpPr>
+          <p:cNvPr id="9" name="Rectangle 8"/>
           <p:cNvSpPr/>
           <p:nvPr/>
         </p:nvSpPr>
         <p:spPr>
           <a:xfrm>
-            <a:off x="10289743" y="1828800"/>
-            <a:ext cx="1188720" cy="237744"/>
+            <a:off x="713232" y="3182112"/>
+            <a:ext cx="33020" cy="658368"/>
           </a:xfrm>
           <a:prstGeom prst="rect">
             <a:avLst/>
           </a:prstGeom>
           <a:solidFill>
-            <a:srgbClr val="F4F2EE"/>
+            <a:srgbClr val="7D3B36"/>
           </a:solidFill>
           <a:ln>
             <a:noFill/>
@@ -9236,38 +10167,96 @@
           </a:fontRef>
         </p:style>
         <p:txBody>
-          <a:bodyPr rtlCol="0" anchor="ctr" lIns="64008" rIns="64008" tIns="0" bIns="0"/>
+          <a:bodyPr rtlCol="0" anchor="ctr"/>
           <a:lstStyle/>
           <a:p>
             <a:pPr algn="ctr"/>
-            <a:r>
-              <a:rPr sz="950" b="1">
-                <a:solidFill>
-                  <a:srgbClr val="7A7772"/>
-                </a:solidFill>
-                <a:latin typeface="Calibri"/>
-              </a:rPr>
-              <a:t>Half a day</a:t>
-            </a:r>
-          </a:p>
-        </p:txBody>
-      </p:sp>
-      <p:sp>
-        <p:nvSpPr>
-          <p:cNvPr id="9" name="Oval 8"/>
+          </a:p>
+        </p:txBody>
+      </p:sp>
+      <p:sp>
+        <p:nvSpPr>
+          <p:cNvPr id="10" name="TextBox 9"/>
+          <p:cNvSpPr txBox="1"/>
+          <p:nvPr/>
+        </p:nvSpPr>
+        <p:spPr>
+          <a:xfrm>
+            <a:off x="914400" y="3182112"/>
+            <a:ext cx="10564063" cy="658368"/>
+          </a:xfrm>
+          <a:prstGeom prst="rect">
+            <a:avLst/>
+          </a:prstGeom>
+          <a:noFill/>
+        </p:spPr>
+        <p:txBody>
+          <a:bodyPr wrap="square" lIns="0" rIns="0" tIns="0" bIns="0" anchor="t">
+            <a:spAutoFit/>
+          </a:bodyPr>
+          <a:lstStyle/>
+          <a:p>
+            <a:pPr algn="l">
+              <a:lnSpc>
+                <a:spcPct val="135000"/>
+              </a:lnSpc>
+              <a:spcBef>
+                <a:spcPts val="0"/>
+              </a:spcBef>
+              <a:spcAft>
+                <a:spcPts val="300"/>
+              </a:spcAft>
+            </a:pPr>
+            <a:r>
+              <a:rPr sz="1250" b="1" i="0">
+                <a:solidFill>
+                  <a:srgbClr val="1A1A1A"/>
+                </a:solidFill>
+                <a:latin typeface="Calibri"/>
+              </a:rPr>
+              <a:t>No user research exists</a:t>
+            </a:r>
+          </a:p>
+          <a:p>
+            <a:pPr>
+              <a:lnSpc>
+                <a:spcPct val="133000"/>
+              </a:lnSpc>
+              <a:spcBef>
+                <a:spcPts val="0"/>
+              </a:spcBef>
+              <a:spcAft>
+                <a:spcPts val="600"/>
+              </a:spcAft>
+            </a:pPr>
+            <a:r>
+              <a:rPr sz="1100" b="0" i="0">
+                <a:solidFill>
+                  <a:srgbClr val="4A4845"/>
+                </a:solidFill>
+                <a:latin typeface="Calibri"/>
+              </a:rPr>
+              <a:t>I have not interviewed a single recruitment or staffing professional. Every statement about what they need is my reasoning, not a finding. The alternatives slide marks which claims I tested myself and which I assumed.</a:t>
+            </a:r>
+          </a:p>
+        </p:txBody>
+      </p:sp>
+      <p:sp>
+        <p:nvSpPr>
+          <p:cNvPr id="11" name="Rectangle 10"/>
           <p:cNvSpPr/>
           <p:nvPr/>
         </p:nvSpPr>
         <p:spPr>
           <a:xfrm>
-            <a:off x="713232" y="2697480"/>
-            <a:ext cx="329184" cy="329184"/>
-          </a:xfrm>
-          <a:prstGeom prst="ellipse">
+            <a:off x="713232" y="3968496"/>
+            <a:ext cx="33020" cy="658368"/>
+          </a:xfrm>
+          <a:prstGeom prst="rect">
             <a:avLst/>
           </a:prstGeom>
           <a:solidFill>
-            <a:srgbClr val="1F3A5F"/>
+            <a:srgbClr val="7A5618"/>
           </a:solidFill>
           <a:ln>
             <a:noFill/>
@@ -9289,32 +10278,23 @@
           </a:fontRef>
         </p:style>
         <p:txBody>
-          <a:bodyPr rtlCol="0" anchor="ctr" lIns="0" rIns="0" tIns="0" bIns="0"/>
+          <a:bodyPr rtlCol="0" anchor="ctr"/>
           <a:lstStyle/>
           <a:p>
             <a:pPr algn="ctr"/>
-            <a:r>
-              <a:rPr sz="1200" b="1">
-                <a:solidFill>
-                  <a:srgbClr val="FFFFFF"/>
-                </a:solidFill>
-                <a:latin typeface="Calibri"/>
-              </a:rPr>
-              <a:t>2</a:t>
-            </a:r>
-          </a:p>
-        </p:txBody>
-      </p:sp>
-      <p:sp>
-        <p:nvSpPr>
-          <p:cNvPr id="10" name="TextBox 9"/>
-          <p:cNvSpPr txBox="1"/>
-          <p:nvPr/>
-        </p:nvSpPr>
-        <p:spPr>
-          <a:xfrm>
-            <a:off x="1207008" y="2642616"/>
-            <a:ext cx="8412480" cy="731520"/>
+          </a:p>
+        </p:txBody>
+      </p:sp>
+      <p:sp>
+        <p:nvSpPr>
+          <p:cNvPr id="12" name="TextBox 11"/>
+          <p:cNvSpPr txBox="1"/>
+          <p:nvPr/>
+        </p:nvSpPr>
+        <p:spPr>
+          <a:xfrm>
+            <a:off x="914400" y="3968496"/>
+            <a:ext cx="10564063" cy="658368"/>
           </a:xfrm>
           <a:prstGeom prst="rect">
             <a:avLst/>
@@ -9339,19 +10319,19 @@
               </a:spcAft>
             </a:pPr>
             <a:r>
-              <a:rPr sz="1350" b="1" i="0">
+              <a:rPr sz="1250" b="1" i="0">
                 <a:solidFill>
                   <a:srgbClr val="1A1A1A"/>
                 </a:solidFill>
                 <a:latin typeface="Calibri"/>
               </a:rPr>
-              <a:t>Talk to eight people who do this job</a:t>
+              <a:t>20 records is a sample, not a market</a:t>
             </a:r>
           </a:p>
           <a:p>
             <a:pPr>
               <a:lnSpc>
-                <a:spcPct val="135000"/>
+                <a:spcPct val="133000"/>
               </a:lnSpc>
               <a:spcBef>
                 <a:spcPts val="0"/>
@@ -9361,33 +10341,33 @@
               </a:spcAft>
             </a:pPr>
             <a:r>
-              <a:rPr sz="1150" b="0" i="0">
+              <a:rPr sz="1100" b="0" i="0">
                 <a:solidFill>
                   <a:srgbClr val="4A4845"/>
                 </a:solidFill>
                 <a:latin typeface="Calibri"/>
               </a:rPr>
-              <a:t>Recruitment and staffing BD leads. One question above all: what do you use today, and what would make you stop using it? This is the assumption the whole product rests on.</a:t>
-            </a:r>
-          </a:p>
-        </p:txBody>
-      </p:sp>
-      <p:sp>
-        <p:nvSpPr>
-          <p:cNvPr id="11" name="Rectangle 10"/>
+              <a:t>Coverage is skewed toward cities and states with active press communications. A count here measures reporting volume, not real activity.</a:t>
+            </a:r>
+          </a:p>
+        </p:txBody>
+      </p:sp>
+      <p:sp>
+        <p:nvSpPr>
+          <p:cNvPr id="13" name="Rectangle 12"/>
           <p:cNvSpPr/>
           <p:nvPr/>
         </p:nvSpPr>
         <p:spPr>
           <a:xfrm>
-            <a:off x="10289743" y="2688336"/>
-            <a:ext cx="1188720" cy="237744"/>
+            <a:off x="713232" y="4754880"/>
+            <a:ext cx="33020" cy="658368"/>
           </a:xfrm>
           <a:prstGeom prst="rect">
             <a:avLst/>
           </a:prstGeom>
           <a:solidFill>
-            <a:srgbClr val="F4F2EE"/>
+            <a:srgbClr val="7A5618"/>
           </a:solidFill>
           <a:ln>
             <a:noFill/>
@@ -9409,38 +10389,96 @@
           </a:fontRef>
         </p:style>
         <p:txBody>
-          <a:bodyPr rtlCol="0" anchor="ctr" lIns="64008" rIns="64008" tIns="0" bIns="0"/>
+          <a:bodyPr rtlCol="0" anchor="ctr"/>
           <a:lstStyle/>
           <a:p>
             <a:pPr algn="ctr"/>
-            <a:r>
-              <a:rPr sz="950" b="1">
-                <a:solidFill>
-                  <a:srgbClr val="7A7772"/>
-                </a:solidFill>
-                <a:latin typeface="Calibri"/>
-              </a:rPr>
-              <a:t>One week</a:t>
-            </a:r>
-          </a:p>
-        </p:txBody>
-      </p:sp>
-      <p:sp>
-        <p:nvSpPr>
-          <p:cNvPr id="12" name="Oval 11"/>
+          </a:p>
+        </p:txBody>
+      </p:sp>
+      <p:sp>
+        <p:nvSpPr>
+          <p:cNvPr id="14" name="TextBox 13"/>
+          <p:cNvSpPr txBox="1"/>
+          <p:nvPr/>
+        </p:nvSpPr>
+        <p:spPr>
+          <a:xfrm>
+            <a:off x="914400" y="4754880"/>
+            <a:ext cx="10564063" cy="658368"/>
+          </a:xfrm>
+          <a:prstGeom prst="rect">
+            <a:avLst/>
+          </a:prstGeom>
+          <a:noFill/>
+        </p:spPr>
+        <p:txBody>
+          <a:bodyPr wrap="square" lIns="0" rIns="0" tIns="0" bIns="0" anchor="t">
+            <a:spAutoFit/>
+          </a:bodyPr>
+          <a:lstStyle/>
+          <a:p>
+            <a:pPr algn="l">
+              <a:lnSpc>
+                <a:spcPct val="135000"/>
+              </a:lnSpc>
+              <a:spcBef>
+                <a:spcPts val="0"/>
+              </a:spcBef>
+              <a:spcAft>
+                <a:spcPts val="300"/>
+              </a:spcAft>
+            </a:pPr>
+            <a:r>
+              <a:rPr sz="1250" b="1" i="0">
+                <a:solidFill>
+                  <a:srgbClr val="1A1A1A"/>
+                </a:solidFill>
+                <a:latin typeface="Calibri"/>
+              </a:rPr>
+              <a:t>It cannot predict, and does not try</a:t>
+            </a:r>
+          </a:p>
+          <a:p>
+            <a:pPr>
+              <a:lnSpc>
+                <a:spcPct val="133000"/>
+              </a:lnSpc>
+              <a:spcBef>
+                <a:spcPts val="0"/>
+              </a:spcBef>
+              <a:spcAft>
+                <a:spcPts val="600"/>
+              </a:spcAft>
+            </a:pPr>
+            <a:r>
+              <a:rPr sz="1100" b="0" i="0">
+                <a:solidFill>
+                  <a:srgbClr val="4A4845"/>
+                </a:solidFill>
+                <a:latin typeface="Calibri"/>
+              </a:rPr>
+              <a:t>I looked for evidence that public signals give reliable early warning of GCC setups. I did not find enough to support that claim, so the product does not make it.</a:t>
+            </a:r>
+          </a:p>
+        </p:txBody>
+      </p:sp>
+      <p:sp>
+        <p:nvSpPr>
+          <p:cNvPr id="15" name="Rectangle 14"/>
           <p:cNvSpPr/>
           <p:nvPr/>
         </p:nvSpPr>
         <p:spPr>
           <a:xfrm>
-            <a:off x="713232" y="3557016"/>
-            <a:ext cx="329184" cy="329184"/>
-          </a:xfrm>
-          <a:prstGeom prst="ellipse">
+            <a:off x="713232" y="5541264"/>
+            <a:ext cx="33020" cy="658368"/>
+          </a:xfrm>
+          <a:prstGeom prst="rect">
             <a:avLst/>
           </a:prstGeom>
           <a:solidFill>
-            <a:srgbClr val="1F3A5F"/>
+            <a:srgbClr val="7A5618"/>
           </a:solidFill>
           <a:ln>
             <a:noFill/>
@@ -9462,32 +10500,23 @@
           </a:fontRef>
         </p:style>
         <p:txBody>
-          <a:bodyPr rtlCol="0" anchor="ctr" lIns="0" rIns="0" tIns="0" bIns="0"/>
+          <a:bodyPr rtlCol="0" anchor="ctr"/>
           <a:lstStyle/>
           <a:p>
             <a:pPr algn="ctr"/>
-            <a:r>
-              <a:rPr sz="1200" b="1">
-                <a:solidFill>
-                  <a:srgbClr val="FFFFFF"/>
-                </a:solidFill>
-                <a:latin typeface="Calibri"/>
-              </a:rPr>
-              <a:t>3</a:t>
-            </a:r>
-          </a:p>
-        </p:txBody>
-      </p:sp>
-      <p:sp>
-        <p:nvSpPr>
-          <p:cNvPr id="13" name="TextBox 12"/>
-          <p:cNvSpPr txBox="1"/>
-          <p:nvPr/>
-        </p:nvSpPr>
-        <p:spPr>
-          <a:xfrm>
-            <a:off x="1207008" y="3502152"/>
-            <a:ext cx="8412480" cy="731520"/>
+          </a:p>
+        </p:txBody>
+      </p:sp>
+      <p:sp>
+        <p:nvSpPr>
+          <p:cNvPr id="16" name="TextBox 15"/>
+          <p:cNvSpPr txBox="1"/>
+          <p:nvPr/>
+        </p:nvSpPr>
+        <p:spPr>
+          <a:xfrm>
+            <a:off x="914400" y="5541264"/>
+            <a:ext cx="10564063" cy="658368"/>
           </a:xfrm>
           <a:prstGeom prst="rect">
             <a:avLst/>
@@ -9512,19 +10541,19 @@
               </a:spcAft>
             </a:pPr>
             <a:r>
-              <a:rPr sz="1350" b="1" i="0">
+              <a:rPr sz="1250" b="1" i="0">
                 <a:solidFill>
                   <a:srgbClr val="1A1A1A"/>
                 </a:solidFill>
                 <a:latin typeface="Calibri"/>
               </a:rPr>
-              <a:t>Test whether state MoUs are an early signal</a:t>
+              <a:t>"Ask" is keyword search, not AI</a:t>
             </a:r>
           </a:p>
           <a:p>
             <a:pPr>
               <a:lnSpc>
-                <a:spcPct val="135000"/>
+                <a:spcPct val="133000"/>
               </a:lnSpc>
               <a:spcBef>
                 <a:spcPts val="0"/>
@@ -9534,419 +10563,20 @@
               </a:spcAft>
             </a:pPr>
             <a:r>
-              <a:rPr sz="1150" b="0" i="0">
+              <a:rPr sz="1100" b="0" i="0">
                 <a:solidFill>
                   <a:srgbClr val="4A4845"/>
                 </a:solidFill>
                 <a:latin typeface="Calibri"/>
               </a:rPr>
-              <a:t>One record here shows roughly 17 months between a state MoU and an opening. If that holds across 20 more cases, it is a genuinely earlier signal than anything in the dataset today.</a:t>
-            </a:r>
-          </a:p>
-        </p:txBody>
-      </p:sp>
-      <p:sp>
-        <p:nvSpPr>
-          <p:cNvPr id="14" name="Rectangle 13"/>
-          <p:cNvSpPr/>
-          <p:nvPr/>
-        </p:nvSpPr>
-        <p:spPr>
-          <a:xfrm>
-            <a:off x="10289743" y="3547872"/>
-            <a:ext cx="1188720" cy="237744"/>
-          </a:xfrm>
-          <a:prstGeom prst="rect">
-            <a:avLst/>
-          </a:prstGeom>
-          <a:solidFill>
-            <a:srgbClr val="F4F2EE"/>
-          </a:solidFill>
-          <a:ln>
-            <a:noFill/>
-          </a:ln>
-          <a:effectLst/>
-        </p:spPr>
-        <p:style>
-          <a:lnRef idx="1">
-            <a:schemeClr val="accent1"/>
-          </a:lnRef>
-          <a:fillRef idx="3">
-            <a:schemeClr val="accent1"/>
-          </a:fillRef>
-          <a:effectRef idx="2">
-            <a:schemeClr val="accent1"/>
-          </a:effectRef>
-          <a:fontRef idx="minor">
-            <a:schemeClr val="lt1"/>
-          </a:fontRef>
-        </p:style>
-        <p:txBody>
-          <a:bodyPr rtlCol="0" anchor="ctr" lIns="64008" rIns="64008" tIns="0" bIns="0"/>
-          <a:lstStyle/>
-          <a:p>
-            <a:pPr algn="ctr"/>
-            <a:r>
-              <a:rPr sz="950" b="1">
-                <a:solidFill>
-                  <a:srgbClr val="7A7772"/>
-                </a:solidFill>
-                <a:latin typeface="Calibri"/>
-              </a:rPr>
-              <a:t>One week</a:t>
-            </a:r>
-          </a:p>
-        </p:txBody>
-      </p:sp>
-      <p:sp>
-        <p:nvSpPr>
-          <p:cNvPr id="15" name="Oval 14"/>
-          <p:cNvSpPr/>
-          <p:nvPr/>
-        </p:nvSpPr>
-        <p:spPr>
-          <a:xfrm>
-            <a:off x="713232" y="4416552"/>
-            <a:ext cx="329184" cy="329184"/>
-          </a:xfrm>
-          <a:prstGeom prst="ellipse">
-            <a:avLst/>
-          </a:prstGeom>
-          <a:solidFill>
-            <a:srgbClr val="1F3A5F"/>
-          </a:solidFill>
-          <a:ln>
-            <a:noFill/>
-          </a:ln>
-          <a:effectLst/>
-        </p:spPr>
-        <p:style>
-          <a:lnRef idx="1">
-            <a:schemeClr val="accent1"/>
-          </a:lnRef>
-          <a:fillRef idx="3">
-            <a:schemeClr val="accent1"/>
-          </a:fillRef>
-          <a:effectRef idx="2">
-            <a:schemeClr val="accent1"/>
-          </a:effectRef>
-          <a:fontRef idx="minor">
-            <a:schemeClr val="lt1"/>
-          </a:fontRef>
-        </p:style>
-        <p:txBody>
-          <a:bodyPr rtlCol="0" anchor="ctr" lIns="0" rIns="0" tIns="0" bIns="0"/>
-          <a:lstStyle/>
-          <a:p>
-            <a:pPr algn="ctr"/>
-            <a:r>
-              <a:rPr sz="1200" b="1">
-                <a:solidFill>
-                  <a:srgbClr val="FFFFFF"/>
-                </a:solidFill>
-                <a:latin typeface="Calibri"/>
-              </a:rPr>
-              <a:t>4</a:t>
-            </a:r>
-          </a:p>
-        </p:txBody>
-      </p:sp>
-      <p:sp>
-        <p:nvSpPr>
-          <p:cNvPr id="16" name="TextBox 15"/>
-          <p:cNvSpPr txBox="1"/>
-          <p:nvPr/>
-        </p:nvSpPr>
-        <p:spPr>
-          <a:xfrm>
-            <a:off x="1207008" y="4361688"/>
-            <a:ext cx="8412480" cy="731520"/>
-          </a:xfrm>
-          <a:prstGeom prst="rect">
-            <a:avLst/>
-          </a:prstGeom>
-          <a:noFill/>
-        </p:spPr>
-        <p:txBody>
-          <a:bodyPr wrap="square" lIns="0" rIns="0" tIns="0" bIns="0" anchor="t">
-            <a:spAutoFit/>
-          </a:bodyPr>
-          <a:lstStyle/>
-          <a:p>
-            <a:pPr algn="l">
-              <a:lnSpc>
-                <a:spcPct val="135000"/>
-              </a:lnSpc>
-              <a:spcBef>
-                <a:spcPts val="0"/>
-              </a:spcBef>
-              <a:spcAft>
-                <a:spcPts val="300"/>
-              </a:spcAft>
-            </a:pPr>
-            <a:r>
-              <a:rPr sz="1350" b="1" i="0">
-                <a:solidFill>
-                  <a:srgbClr val="1A1A1A"/>
-                </a:solidFill>
-                <a:latin typeface="Calibri"/>
-              </a:rPr>
-              <a:t>Widen coverage with a repeatable method</a:t>
-            </a:r>
-          </a:p>
-          <a:p>
-            <a:pPr>
-              <a:lnSpc>
-                <a:spcPct val="135000"/>
-              </a:lnSpc>
-              <a:spcBef>
-                <a:spcPts val="0"/>
-              </a:spcBef>
-              <a:spcAft>
-                <a:spcPts val="600"/>
-              </a:spcAft>
-            </a:pPr>
-            <a:r>
-              <a:rPr sz="1150" b="0" i="0">
-                <a:solidFill>
-                  <a:srgbClr val="4A4845"/>
-                </a:solidFill>
-                <a:latin typeface="Calibri"/>
-              </a:rPr>
-              <a:t>Move from manual searching to a defined collection process, and record why each candidate was included or excluded.</a:t>
-            </a:r>
-          </a:p>
-        </p:txBody>
-      </p:sp>
-      <p:sp>
-        <p:nvSpPr>
-          <p:cNvPr id="17" name="Rectangle 16"/>
-          <p:cNvSpPr/>
-          <p:nvPr/>
-        </p:nvSpPr>
-        <p:spPr>
-          <a:xfrm>
-            <a:off x="10289743" y="4407408"/>
-            <a:ext cx="1188720" cy="237744"/>
-          </a:xfrm>
-          <a:prstGeom prst="rect">
-            <a:avLst/>
-          </a:prstGeom>
-          <a:solidFill>
-            <a:srgbClr val="F4F2EE"/>
-          </a:solidFill>
-          <a:ln>
-            <a:noFill/>
-          </a:ln>
-          <a:effectLst/>
-        </p:spPr>
-        <p:style>
-          <a:lnRef idx="1">
-            <a:schemeClr val="accent1"/>
-          </a:lnRef>
-          <a:fillRef idx="3">
-            <a:schemeClr val="accent1"/>
-          </a:fillRef>
-          <a:effectRef idx="2">
-            <a:schemeClr val="accent1"/>
-          </a:effectRef>
-          <a:fontRef idx="minor">
-            <a:schemeClr val="lt1"/>
-          </a:fontRef>
-        </p:style>
-        <p:txBody>
-          <a:bodyPr rtlCol="0" anchor="ctr" lIns="64008" rIns="64008" tIns="0" bIns="0"/>
-          <a:lstStyle/>
-          <a:p>
-            <a:pPr algn="ctr"/>
-            <a:r>
-              <a:rPr sz="950" b="1">
-                <a:solidFill>
-                  <a:srgbClr val="7A7772"/>
-                </a:solidFill>
-                <a:latin typeface="Calibri"/>
-              </a:rPr>
-              <a:t>Two weeks</a:t>
-            </a:r>
-          </a:p>
-        </p:txBody>
-      </p:sp>
-      <p:sp>
-        <p:nvSpPr>
-          <p:cNvPr id="18" name="Oval 17"/>
-          <p:cNvSpPr/>
-          <p:nvPr/>
-        </p:nvSpPr>
-        <p:spPr>
-          <a:xfrm>
-            <a:off x="713232" y="5276088"/>
-            <a:ext cx="329184" cy="329184"/>
-          </a:xfrm>
-          <a:prstGeom prst="ellipse">
-            <a:avLst/>
-          </a:prstGeom>
-          <a:solidFill>
-            <a:srgbClr val="1F3A5F"/>
-          </a:solidFill>
-          <a:ln>
-            <a:noFill/>
-          </a:ln>
-          <a:effectLst/>
-        </p:spPr>
-        <p:style>
-          <a:lnRef idx="1">
-            <a:schemeClr val="accent1"/>
-          </a:lnRef>
-          <a:fillRef idx="3">
-            <a:schemeClr val="accent1"/>
-          </a:fillRef>
-          <a:effectRef idx="2">
-            <a:schemeClr val="accent1"/>
-          </a:effectRef>
-          <a:fontRef idx="minor">
-            <a:schemeClr val="lt1"/>
-          </a:fontRef>
-        </p:style>
-        <p:txBody>
-          <a:bodyPr rtlCol="0" anchor="ctr" lIns="0" rIns="0" tIns="0" bIns="0"/>
-          <a:lstStyle/>
-          <a:p>
-            <a:pPr algn="ctr"/>
-            <a:r>
-              <a:rPr sz="1200" b="1">
-                <a:solidFill>
-                  <a:srgbClr val="FFFFFF"/>
-                </a:solidFill>
-                <a:latin typeface="Calibri"/>
-              </a:rPr>
-              <a:t>5</a:t>
-            </a:r>
-          </a:p>
-        </p:txBody>
-      </p:sp>
-      <p:sp>
-        <p:nvSpPr>
-          <p:cNvPr id="19" name="TextBox 18"/>
-          <p:cNvSpPr txBox="1"/>
-          <p:nvPr/>
-        </p:nvSpPr>
-        <p:spPr>
-          <a:xfrm>
-            <a:off x="1207008" y="5221224"/>
-            <a:ext cx="8412480" cy="731520"/>
-          </a:xfrm>
-          <a:prstGeom prst="rect">
-            <a:avLst/>
-          </a:prstGeom>
-          <a:noFill/>
-        </p:spPr>
-        <p:txBody>
-          <a:bodyPr wrap="square" lIns="0" rIns="0" tIns="0" bIns="0" anchor="t">
-            <a:spAutoFit/>
-          </a:bodyPr>
-          <a:lstStyle/>
-          <a:p>
-            <a:pPr algn="l">
-              <a:lnSpc>
-                <a:spcPct val="135000"/>
-              </a:lnSpc>
-              <a:spcBef>
-                <a:spcPts val="0"/>
-              </a:spcBef>
-              <a:spcAft>
-                <a:spcPts val="300"/>
-              </a:spcAft>
-            </a:pPr>
-            <a:r>
-              <a:rPr sz="1350" b="1" i="0">
-                <a:solidFill>
-                  <a:srgbClr val="1A1A1A"/>
-                </a:solidFill>
-                <a:latin typeface="Calibri"/>
-              </a:rPr>
-              <a:t>Add company registry data</a:t>
-            </a:r>
-          </a:p>
-          <a:p>
-            <a:pPr>
-              <a:lnSpc>
-                <a:spcPct val="135000"/>
-              </a:lnSpc>
-              <a:spcBef>
-                <a:spcPts val="0"/>
-              </a:spcBef>
-              <a:spcAft>
-                <a:spcPts val="600"/>
-              </a:spcAft>
-            </a:pPr>
-            <a:r>
-              <a:rPr sz="1150" b="0" i="0">
-                <a:solidFill>
-                  <a:srgbClr val="4A4845"/>
-                </a:solidFill>
-                <a:latin typeface="Calibri"/>
-              </a:rPr>
-              <a:t>Tie each centre to its Indian legal entity, so the same company is never counted twice under two names.</a:t>
-            </a:r>
-          </a:p>
-        </p:txBody>
-      </p:sp>
-      <p:sp>
-        <p:nvSpPr>
-          <p:cNvPr id="20" name="Rectangle 19"/>
-          <p:cNvSpPr/>
-          <p:nvPr/>
-        </p:nvSpPr>
-        <p:spPr>
-          <a:xfrm>
-            <a:off x="10289743" y="5266944"/>
-            <a:ext cx="1188720" cy="237744"/>
-          </a:xfrm>
-          <a:prstGeom prst="rect">
-            <a:avLst/>
-          </a:prstGeom>
-          <a:solidFill>
-            <a:srgbClr val="F4F2EE"/>
-          </a:solidFill>
-          <a:ln>
-            <a:noFill/>
-          </a:ln>
-          <a:effectLst/>
-        </p:spPr>
-        <p:style>
-          <a:lnRef idx="1">
-            <a:schemeClr val="accent1"/>
-          </a:lnRef>
-          <a:fillRef idx="3">
-            <a:schemeClr val="accent1"/>
-          </a:fillRef>
-          <a:effectRef idx="2">
-            <a:schemeClr val="accent1"/>
-          </a:effectRef>
-          <a:fontRef idx="minor">
-            <a:schemeClr val="lt1"/>
-          </a:fontRef>
-        </p:style>
-        <p:txBody>
-          <a:bodyPr rtlCol="0" anchor="ctr" lIns="64008" rIns="64008" tIns="0" bIns="0"/>
-          <a:lstStyle/>
-          <a:p>
-            <a:pPr algn="ctr"/>
-            <a:r>
-              <a:rPr sz="950" b="1">
-                <a:solidFill>
-                  <a:srgbClr val="7A7772"/>
-                </a:solidFill>
-                <a:latin typeface="Calibri"/>
-              </a:rPr>
-              <a:t>Later</a:t>
-            </a:r>
-          </a:p>
-        </p:txBody>
-      </p:sp>
-      <p:sp>
-        <p:nvSpPr>
-          <p:cNvPr id="21" name="TextBox 20"/>
+              <a:t>It scores records by word overlap and detects a few patterns. The app says so on the page itself. No model, no API key, no cost.</a:t>
+            </a:r>
+          </a:p>
+        </p:txBody>
+      </p:sp>
+      <p:sp>
+        <p:nvSpPr>
+          <p:cNvPr id="17" name="TextBox 16"/>
           <p:cNvSpPr txBox="1"/>
           <p:nvPr/>
         </p:nvSpPr>
@@ -9990,14 +10620,14 @@
                 </a:solidFill>
                 <a:latin typeface="Calibri"/>
               </a:rPr>
-              <a:t>   ·   Next steps</a:t>
-            </a:r>
-          </a:p>
-        </p:txBody>
-      </p:sp>
-      <p:sp>
-        <p:nvSpPr>
-          <p:cNvPr id="22" name="TextBox 21"/>
+              <a:t>   ·   Limitations &amp; assumptions</a:t>
+            </a:r>
+          </a:p>
+        </p:txBody>
+      </p:sp>
+      <p:sp>
+        <p:nvSpPr>
+          <p:cNvPr id="18" name="TextBox 17"/>
           <p:cNvSpPr txBox="1"/>
           <p:nvPr/>
         </p:nvSpPr>
@@ -10073,7 +10703,7 @@
             <a:avLst/>
           </a:prstGeom>
           <a:solidFill>
-            <a:srgbClr val="FFFFFF"/>
+            <a:srgbClr val="FBFAF8"/>
           </a:solidFill>
           <a:ln>
             <a:noFill/>
@@ -10104,16 +10734,150 @@
       </p:sp>
       <p:sp>
         <p:nvSpPr>
-          <p:cNvPr id="3" name="Rectangle 2"/>
+          <p:cNvPr id="3" name="TextBox 2"/>
+          <p:cNvSpPr txBox="1"/>
+          <p:nvPr/>
+        </p:nvSpPr>
+        <p:spPr>
+          <a:xfrm>
+            <a:off x="713232" y="475488"/>
+            <a:ext cx="10765231" cy="237744"/>
+          </a:xfrm>
+          <a:prstGeom prst="rect">
+            <a:avLst/>
+          </a:prstGeom>
+          <a:noFill/>
+        </p:spPr>
+        <p:txBody>
+          <a:bodyPr wrap="square" lIns="0" rIns="0" tIns="0" bIns="0" anchor="t">
+            <a:spAutoFit/>
+          </a:bodyPr>
+          <a:lstStyle/>
+          <a:p>
+            <a:pPr algn="l">
+              <a:lnSpc>
+                <a:spcPct val="135000"/>
+              </a:lnSpc>
+              <a:spcBef>
+                <a:spcPts val="0"/>
+              </a:spcBef>
+              <a:spcAft>
+                <a:spcPts val="0"/>
+              </a:spcAft>
+            </a:pPr>
+            <a:r>
+              <a:rPr sz="1050" b="1" i="0">
+                <a:solidFill>
+                  <a:srgbClr val="7A7772"/>
+                </a:solidFill>
+                <a:latin typeface="Calibri"/>
+              </a:rPr>
+              <a:t>NEXT</a:t>
+            </a:r>
+          </a:p>
+        </p:txBody>
+      </p:sp>
+      <p:sp>
+        <p:nvSpPr>
+          <p:cNvPr id="4" name="TextBox 3"/>
+          <p:cNvSpPr txBox="1"/>
+          <p:nvPr/>
+        </p:nvSpPr>
+        <p:spPr>
+          <a:xfrm>
+            <a:off x="713232" y="768096"/>
+            <a:ext cx="10765231" cy="914400"/>
+          </a:xfrm>
+          <a:prstGeom prst="rect">
+            <a:avLst/>
+          </a:prstGeom>
+          <a:noFill/>
+        </p:spPr>
+        <p:txBody>
+          <a:bodyPr wrap="square" lIns="0" rIns="0" tIns="0" bIns="0" anchor="t">
+            <a:spAutoFit/>
+          </a:bodyPr>
+          <a:lstStyle/>
+          <a:p>
+            <a:pPr algn="l">
+              <a:lnSpc>
+                <a:spcPct val="112000"/>
+              </a:lnSpc>
+              <a:spcBef>
+                <a:spcPts val="0"/>
+              </a:spcBef>
+              <a:spcAft>
+                <a:spcPts val="0"/>
+              </a:spcAft>
+            </a:pPr>
+            <a:r>
+              <a:rPr sz="3200" b="0" i="0">
+                <a:solidFill>
+                  <a:srgbClr val="1A1A1A"/>
+                </a:solidFill>
+                <a:latin typeface="Georgia"/>
+              </a:rPr>
+              <a:t>What I would do next, in order</a:t>
+            </a:r>
+          </a:p>
+        </p:txBody>
+      </p:sp>
+      <p:sp>
+        <p:nvSpPr>
+          <p:cNvPr id="5" name="Rectangle 4"/>
           <p:cNvSpPr/>
           <p:nvPr/>
         </p:nvSpPr>
         <p:spPr>
           <a:xfrm>
-            <a:off x="0" y="0"/>
-            <a:ext cx="118872" cy="6858000"/>
-          </a:xfrm>
-          <a:prstGeom prst="rect">
+            <a:off x="713232" y="1426464"/>
+            <a:ext cx="10765231" cy="11430"/>
+          </a:xfrm>
+          <a:prstGeom prst="rect">
+            <a:avLst/>
+          </a:prstGeom>
+          <a:solidFill>
+            <a:srgbClr val="E2DED7"/>
+          </a:solidFill>
+          <a:ln>
+            <a:noFill/>
+          </a:ln>
+          <a:effectLst/>
+        </p:spPr>
+        <p:style>
+          <a:lnRef idx="1">
+            <a:schemeClr val="accent1"/>
+          </a:lnRef>
+          <a:fillRef idx="3">
+            <a:schemeClr val="accent1"/>
+          </a:fillRef>
+          <a:effectRef idx="2">
+            <a:schemeClr val="accent1"/>
+          </a:effectRef>
+          <a:fontRef idx="minor">
+            <a:schemeClr val="lt1"/>
+          </a:fontRef>
+        </p:style>
+        <p:txBody>
+          <a:bodyPr rtlCol="0" anchor="ctr"/>
+          <a:lstStyle/>
+          <a:p>
+            <a:pPr algn="ctr"/>
+          </a:p>
+        </p:txBody>
+      </p:sp>
+      <p:sp>
+        <p:nvSpPr>
+          <p:cNvPr id="6" name="Oval 5"/>
+          <p:cNvSpPr/>
+          <p:nvPr/>
+        </p:nvSpPr>
+        <p:spPr>
+          <a:xfrm>
+            <a:off x="713232" y="1837944"/>
+            <a:ext cx="329184" cy="329184"/>
+          </a:xfrm>
+          <a:prstGeom prst="ellipse">
             <a:avLst/>
           </a:prstGeom>
           <a:solidFill>
@@ -10139,23 +10903,32 @@
           </a:fontRef>
         </p:style>
         <p:txBody>
-          <a:bodyPr rtlCol="0" anchor="ctr"/>
+          <a:bodyPr rtlCol="0" anchor="ctr" lIns="0" rIns="0" tIns="0" bIns="0"/>
           <a:lstStyle/>
           <a:p>
             <a:pPr algn="ctr"/>
-          </a:p>
-        </p:txBody>
-      </p:sp>
-      <p:sp>
-        <p:nvSpPr>
-          <p:cNvPr id="4" name="TextBox 3"/>
-          <p:cNvSpPr txBox="1"/>
-          <p:nvPr/>
-        </p:nvSpPr>
-        <p:spPr>
-          <a:xfrm>
-            <a:off x="1143000" y="1691640"/>
-            <a:ext cx="9509760" cy="914400"/>
+            <a:r>
+              <a:rPr sz="1200" b="1">
+                <a:solidFill>
+                  <a:srgbClr val="FFFFFF"/>
+                </a:solidFill>
+                <a:latin typeface="Calibri"/>
+              </a:rPr>
+              <a:t>1</a:t>
+            </a:r>
+          </a:p>
+        </p:txBody>
+      </p:sp>
+      <p:sp>
+        <p:nvSpPr>
+          <p:cNvPr id="7" name="TextBox 6"/>
+          <p:cNvSpPr txBox="1"/>
+          <p:nvPr/>
+        </p:nvSpPr>
+        <p:spPr>
+          <a:xfrm>
+            <a:off x="1207008" y="1783080"/>
+            <a:ext cx="8412480" cy="731520"/>
           </a:xfrm>
           <a:prstGeom prst="rect">
             <a:avLst/>
@@ -10176,56 +10949,108 @@
                 <a:spcPts val="0"/>
               </a:spcBef>
               <a:spcAft>
-                <a:spcPts val="1600"/>
-              </a:spcAft>
-            </a:pPr>
-            <a:r>
-              <a:rPr sz="1500" b="1" i="0">
+                <a:spcPts val="300"/>
+              </a:spcAft>
+            </a:pPr>
+            <a:r>
+              <a:rPr sz="1350" b="1" i="0">
+                <a:solidFill>
+                  <a:srgbClr val="1A1A1A"/>
+                </a:solidFill>
+                <a:latin typeface="Calibri"/>
+              </a:rPr>
+              <a:t>Confirm all 47 sources</a:t>
+            </a:r>
+          </a:p>
+          <a:p>
+            <a:pPr>
+              <a:lnSpc>
+                <a:spcPct val="135000"/>
+              </a:lnSpc>
+              <a:spcBef>
+                <a:spcPts val="0"/>
+              </a:spcBef>
+              <a:spcAft>
+                <a:spcPts val="600"/>
+              </a:spcAft>
+            </a:pPr>
+            <a:r>
+              <a:rPr sz="1150" b="0" i="0">
+                <a:solidFill>
+                  <a:srgbClr val="4A4845"/>
+                </a:solidFill>
+                <a:latin typeface="Calibri"/>
+              </a:rPr>
+              <a:t>Open every link, confirm it supports the record, log who checked it and when. Nothing else matters until this is done.</a:t>
+            </a:r>
+          </a:p>
+        </p:txBody>
+      </p:sp>
+      <p:sp>
+        <p:nvSpPr>
+          <p:cNvPr id="8" name="Rectangle 7"/>
+          <p:cNvSpPr/>
+          <p:nvPr/>
+        </p:nvSpPr>
+        <p:spPr>
+          <a:xfrm>
+            <a:off x="10289743" y="1828800"/>
+            <a:ext cx="1188720" cy="237744"/>
+          </a:xfrm>
+          <a:prstGeom prst="rect">
+            <a:avLst/>
+          </a:prstGeom>
+          <a:solidFill>
+            <a:srgbClr val="F4F2EE"/>
+          </a:solidFill>
+          <a:ln>
+            <a:noFill/>
+          </a:ln>
+          <a:effectLst/>
+        </p:spPr>
+        <p:style>
+          <a:lnRef idx="1">
+            <a:schemeClr val="accent1"/>
+          </a:lnRef>
+          <a:fillRef idx="3">
+            <a:schemeClr val="accent1"/>
+          </a:fillRef>
+          <a:effectRef idx="2">
+            <a:schemeClr val="accent1"/>
+          </a:effectRef>
+          <a:fontRef idx="minor">
+            <a:schemeClr val="lt1"/>
+          </a:fontRef>
+        </p:style>
+        <p:txBody>
+          <a:bodyPr rtlCol="0" anchor="ctr" lIns="64008" rIns="64008" tIns="0" bIns="0"/>
+          <a:lstStyle/>
+          <a:p>
+            <a:pPr algn="ctr"/>
+            <a:r>
+              <a:rPr sz="950" b="1">
                 <a:solidFill>
                   <a:srgbClr val="7A7772"/>
                 </a:solidFill>
                 <a:latin typeface="Calibri"/>
               </a:rPr>
-              <a:t>The argument in one line</a:t>
-            </a:r>
-          </a:p>
-          <a:p>
-            <a:pPr>
-              <a:lnSpc>
-                <a:spcPct val="125000"/>
-              </a:lnSpc>
-              <a:spcBef>
-                <a:spcPts val="0"/>
-              </a:spcBef>
-              <a:spcAft>
-                <a:spcPts val="2000"/>
-              </a:spcAft>
-            </a:pPr>
-            <a:r>
-              <a:rPr sz="3000" b="0" i="0">
-                <a:solidFill>
-                  <a:srgbClr val="1A1A1A"/>
-                </a:solidFill>
-                <a:latin typeface="Georgia"/>
-              </a:rPr>
-              <a:t>This market does not lack information.
-It lacks information you can check.</a:t>
-            </a:r>
-          </a:p>
-        </p:txBody>
-      </p:sp>
-      <p:sp>
-        <p:nvSpPr>
-          <p:cNvPr id="5" name="Rectangle 4"/>
+              <a:t>Half a day</a:t>
+            </a:r>
+          </a:p>
+        </p:txBody>
+      </p:sp>
+      <p:sp>
+        <p:nvSpPr>
+          <p:cNvPr id="9" name="Oval 8"/>
           <p:cNvSpPr/>
           <p:nvPr/>
         </p:nvSpPr>
         <p:spPr>
           <a:xfrm>
-            <a:off x="1143000" y="3886200"/>
-            <a:ext cx="1828800" cy="11430"/>
-          </a:xfrm>
-          <a:prstGeom prst="rect">
+            <a:off x="713232" y="2697480"/>
+            <a:ext cx="329184" cy="329184"/>
+          </a:xfrm>
+          <a:prstGeom prst="ellipse">
             <a:avLst/>
           </a:prstGeom>
           <a:solidFill>
@@ -10251,6 +11076,968 @@
           </a:fontRef>
         </p:style>
         <p:txBody>
+          <a:bodyPr rtlCol="0" anchor="ctr" lIns="0" rIns="0" tIns="0" bIns="0"/>
+          <a:lstStyle/>
+          <a:p>
+            <a:pPr algn="ctr"/>
+            <a:r>
+              <a:rPr sz="1200" b="1">
+                <a:solidFill>
+                  <a:srgbClr val="FFFFFF"/>
+                </a:solidFill>
+                <a:latin typeface="Calibri"/>
+              </a:rPr>
+              <a:t>2</a:t>
+            </a:r>
+          </a:p>
+        </p:txBody>
+      </p:sp>
+      <p:sp>
+        <p:nvSpPr>
+          <p:cNvPr id="10" name="TextBox 9"/>
+          <p:cNvSpPr txBox="1"/>
+          <p:nvPr/>
+        </p:nvSpPr>
+        <p:spPr>
+          <a:xfrm>
+            <a:off x="1207008" y="2642616"/>
+            <a:ext cx="8412480" cy="731520"/>
+          </a:xfrm>
+          <a:prstGeom prst="rect">
+            <a:avLst/>
+          </a:prstGeom>
+          <a:noFill/>
+        </p:spPr>
+        <p:txBody>
+          <a:bodyPr wrap="square" lIns="0" rIns="0" tIns="0" bIns="0" anchor="t">
+            <a:spAutoFit/>
+          </a:bodyPr>
+          <a:lstStyle/>
+          <a:p>
+            <a:pPr algn="l">
+              <a:lnSpc>
+                <a:spcPct val="135000"/>
+              </a:lnSpc>
+              <a:spcBef>
+                <a:spcPts val="0"/>
+              </a:spcBef>
+              <a:spcAft>
+                <a:spcPts val="300"/>
+              </a:spcAft>
+            </a:pPr>
+            <a:r>
+              <a:rPr sz="1350" b="1" i="0">
+                <a:solidFill>
+                  <a:srgbClr val="1A1A1A"/>
+                </a:solidFill>
+                <a:latin typeface="Calibri"/>
+              </a:rPr>
+              <a:t>Talk to eight people who do this job</a:t>
+            </a:r>
+          </a:p>
+          <a:p>
+            <a:pPr>
+              <a:lnSpc>
+                <a:spcPct val="135000"/>
+              </a:lnSpc>
+              <a:spcBef>
+                <a:spcPts val="0"/>
+              </a:spcBef>
+              <a:spcAft>
+                <a:spcPts val="600"/>
+              </a:spcAft>
+            </a:pPr>
+            <a:r>
+              <a:rPr sz="1150" b="0" i="0">
+                <a:solidFill>
+                  <a:srgbClr val="4A4845"/>
+                </a:solidFill>
+                <a:latin typeface="Calibri"/>
+              </a:rPr>
+              <a:t>Recruitment and staffing BD leads. One question above all: what do you use today, and what would make you stop using it? This is the assumption the whole product rests on.</a:t>
+            </a:r>
+          </a:p>
+        </p:txBody>
+      </p:sp>
+      <p:sp>
+        <p:nvSpPr>
+          <p:cNvPr id="11" name="Rectangle 10"/>
+          <p:cNvSpPr/>
+          <p:nvPr/>
+        </p:nvSpPr>
+        <p:spPr>
+          <a:xfrm>
+            <a:off x="10289743" y="2688336"/>
+            <a:ext cx="1188720" cy="237744"/>
+          </a:xfrm>
+          <a:prstGeom prst="rect">
+            <a:avLst/>
+          </a:prstGeom>
+          <a:solidFill>
+            <a:srgbClr val="F4F2EE"/>
+          </a:solidFill>
+          <a:ln>
+            <a:noFill/>
+          </a:ln>
+          <a:effectLst/>
+        </p:spPr>
+        <p:style>
+          <a:lnRef idx="1">
+            <a:schemeClr val="accent1"/>
+          </a:lnRef>
+          <a:fillRef idx="3">
+            <a:schemeClr val="accent1"/>
+          </a:fillRef>
+          <a:effectRef idx="2">
+            <a:schemeClr val="accent1"/>
+          </a:effectRef>
+          <a:fontRef idx="minor">
+            <a:schemeClr val="lt1"/>
+          </a:fontRef>
+        </p:style>
+        <p:txBody>
+          <a:bodyPr rtlCol="0" anchor="ctr" lIns="64008" rIns="64008" tIns="0" bIns="0"/>
+          <a:lstStyle/>
+          <a:p>
+            <a:pPr algn="ctr"/>
+            <a:r>
+              <a:rPr sz="950" b="1">
+                <a:solidFill>
+                  <a:srgbClr val="7A7772"/>
+                </a:solidFill>
+                <a:latin typeface="Calibri"/>
+              </a:rPr>
+              <a:t>One week</a:t>
+            </a:r>
+          </a:p>
+        </p:txBody>
+      </p:sp>
+      <p:sp>
+        <p:nvSpPr>
+          <p:cNvPr id="12" name="Oval 11"/>
+          <p:cNvSpPr/>
+          <p:nvPr/>
+        </p:nvSpPr>
+        <p:spPr>
+          <a:xfrm>
+            <a:off x="713232" y="3557016"/>
+            <a:ext cx="329184" cy="329184"/>
+          </a:xfrm>
+          <a:prstGeom prst="ellipse">
+            <a:avLst/>
+          </a:prstGeom>
+          <a:solidFill>
+            <a:srgbClr val="1F3A5F"/>
+          </a:solidFill>
+          <a:ln>
+            <a:noFill/>
+          </a:ln>
+          <a:effectLst/>
+        </p:spPr>
+        <p:style>
+          <a:lnRef idx="1">
+            <a:schemeClr val="accent1"/>
+          </a:lnRef>
+          <a:fillRef idx="3">
+            <a:schemeClr val="accent1"/>
+          </a:fillRef>
+          <a:effectRef idx="2">
+            <a:schemeClr val="accent1"/>
+          </a:effectRef>
+          <a:fontRef idx="minor">
+            <a:schemeClr val="lt1"/>
+          </a:fontRef>
+        </p:style>
+        <p:txBody>
+          <a:bodyPr rtlCol="0" anchor="ctr" lIns="0" rIns="0" tIns="0" bIns="0"/>
+          <a:lstStyle/>
+          <a:p>
+            <a:pPr algn="ctr"/>
+            <a:r>
+              <a:rPr sz="1200" b="1">
+                <a:solidFill>
+                  <a:srgbClr val="FFFFFF"/>
+                </a:solidFill>
+                <a:latin typeface="Calibri"/>
+              </a:rPr>
+              <a:t>3</a:t>
+            </a:r>
+          </a:p>
+        </p:txBody>
+      </p:sp>
+      <p:sp>
+        <p:nvSpPr>
+          <p:cNvPr id="13" name="TextBox 12"/>
+          <p:cNvSpPr txBox="1"/>
+          <p:nvPr/>
+        </p:nvSpPr>
+        <p:spPr>
+          <a:xfrm>
+            <a:off x="1207008" y="3502152"/>
+            <a:ext cx="8412480" cy="731520"/>
+          </a:xfrm>
+          <a:prstGeom prst="rect">
+            <a:avLst/>
+          </a:prstGeom>
+          <a:noFill/>
+        </p:spPr>
+        <p:txBody>
+          <a:bodyPr wrap="square" lIns="0" rIns="0" tIns="0" bIns="0" anchor="t">
+            <a:spAutoFit/>
+          </a:bodyPr>
+          <a:lstStyle/>
+          <a:p>
+            <a:pPr algn="l">
+              <a:lnSpc>
+                <a:spcPct val="135000"/>
+              </a:lnSpc>
+              <a:spcBef>
+                <a:spcPts val="0"/>
+              </a:spcBef>
+              <a:spcAft>
+                <a:spcPts val="300"/>
+              </a:spcAft>
+            </a:pPr>
+            <a:r>
+              <a:rPr sz="1350" b="1" i="0">
+                <a:solidFill>
+                  <a:srgbClr val="1A1A1A"/>
+                </a:solidFill>
+                <a:latin typeface="Calibri"/>
+              </a:rPr>
+              <a:t>Test whether state MoUs are an early signal</a:t>
+            </a:r>
+          </a:p>
+          <a:p>
+            <a:pPr>
+              <a:lnSpc>
+                <a:spcPct val="135000"/>
+              </a:lnSpc>
+              <a:spcBef>
+                <a:spcPts val="0"/>
+              </a:spcBef>
+              <a:spcAft>
+                <a:spcPts val="600"/>
+              </a:spcAft>
+            </a:pPr>
+            <a:r>
+              <a:rPr sz="1150" b="0" i="0">
+                <a:solidFill>
+                  <a:srgbClr val="4A4845"/>
+                </a:solidFill>
+                <a:latin typeface="Calibri"/>
+              </a:rPr>
+              <a:t>One record here shows roughly 17 months between a state MoU and an opening. If that holds across 20 more cases, it is a genuinely earlier signal than anything in the dataset today.</a:t>
+            </a:r>
+          </a:p>
+        </p:txBody>
+      </p:sp>
+      <p:sp>
+        <p:nvSpPr>
+          <p:cNvPr id="14" name="Rectangle 13"/>
+          <p:cNvSpPr/>
+          <p:nvPr/>
+        </p:nvSpPr>
+        <p:spPr>
+          <a:xfrm>
+            <a:off x="10289743" y="3547872"/>
+            <a:ext cx="1188720" cy="237744"/>
+          </a:xfrm>
+          <a:prstGeom prst="rect">
+            <a:avLst/>
+          </a:prstGeom>
+          <a:solidFill>
+            <a:srgbClr val="F4F2EE"/>
+          </a:solidFill>
+          <a:ln>
+            <a:noFill/>
+          </a:ln>
+          <a:effectLst/>
+        </p:spPr>
+        <p:style>
+          <a:lnRef idx="1">
+            <a:schemeClr val="accent1"/>
+          </a:lnRef>
+          <a:fillRef idx="3">
+            <a:schemeClr val="accent1"/>
+          </a:fillRef>
+          <a:effectRef idx="2">
+            <a:schemeClr val="accent1"/>
+          </a:effectRef>
+          <a:fontRef idx="minor">
+            <a:schemeClr val="lt1"/>
+          </a:fontRef>
+        </p:style>
+        <p:txBody>
+          <a:bodyPr rtlCol="0" anchor="ctr" lIns="64008" rIns="64008" tIns="0" bIns="0"/>
+          <a:lstStyle/>
+          <a:p>
+            <a:pPr algn="ctr"/>
+            <a:r>
+              <a:rPr sz="950" b="1">
+                <a:solidFill>
+                  <a:srgbClr val="7A7772"/>
+                </a:solidFill>
+                <a:latin typeface="Calibri"/>
+              </a:rPr>
+              <a:t>One week</a:t>
+            </a:r>
+          </a:p>
+        </p:txBody>
+      </p:sp>
+      <p:sp>
+        <p:nvSpPr>
+          <p:cNvPr id="15" name="Oval 14"/>
+          <p:cNvSpPr/>
+          <p:nvPr/>
+        </p:nvSpPr>
+        <p:spPr>
+          <a:xfrm>
+            <a:off x="713232" y="4416552"/>
+            <a:ext cx="329184" cy="329184"/>
+          </a:xfrm>
+          <a:prstGeom prst="ellipse">
+            <a:avLst/>
+          </a:prstGeom>
+          <a:solidFill>
+            <a:srgbClr val="1F3A5F"/>
+          </a:solidFill>
+          <a:ln>
+            <a:noFill/>
+          </a:ln>
+          <a:effectLst/>
+        </p:spPr>
+        <p:style>
+          <a:lnRef idx="1">
+            <a:schemeClr val="accent1"/>
+          </a:lnRef>
+          <a:fillRef idx="3">
+            <a:schemeClr val="accent1"/>
+          </a:fillRef>
+          <a:effectRef idx="2">
+            <a:schemeClr val="accent1"/>
+          </a:effectRef>
+          <a:fontRef idx="minor">
+            <a:schemeClr val="lt1"/>
+          </a:fontRef>
+        </p:style>
+        <p:txBody>
+          <a:bodyPr rtlCol="0" anchor="ctr" lIns="0" rIns="0" tIns="0" bIns="0"/>
+          <a:lstStyle/>
+          <a:p>
+            <a:pPr algn="ctr"/>
+            <a:r>
+              <a:rPr sz="1200" b="1">
+                <a:solidFill>
+                  <a:srgbClr val="FFFFFF"/>
+                </a:solidFill>
+                <a:latin typeface="Calibri"/>
+              </a:rPr>
+              <a:t>4</a:t>
+            </a:r>
+          </a:p>
+        </p:txBody>
+      </p:sp>
+      <p:sp>
+        <p:nvSpPr>
+          <p:cNvPr id="16" name="TextBox 15"/>
+          <p:cNvSpPr txBox="1"/>
+          <p:nvPr/>
+        </p:nvSpPr>
+        <p:spPr>
+          <a:xfrm>
+            <a:off x="1207008" y="4361688"/>
+            <a:ext cx="8412480" cy="731520"/>
+          </a:xfrm>
+          <a:prstGeom prst="rect">
+            <a:avLst/>
+          </a:prstGeom>
+          <a:noFill/>
+        </p:spPr>
+        <p:txBody>
+          <a:bodyPr wrap="square" lIns="0" rIns="0" tIns="0" bIns="0" anchor="t">
+            <a:spAutoFit/>
+          </a:bodyPr>
+          <a:lstStyle/>
+          <a:p>
+            <a:pPr algn="l">
+              <a:lnSpc>
+                <a:spcPct val="135000"/>
+              </a:lnSpc>
+              <a:spcBef>
+                <a:spcPts val="0"/>
+              </a:spcBef>
+              <a:spcAft>
+                <a:spcPts val="300"/>
+              </a:spcAft>
+            </a:pPr>
+            <a:r>
+              <a:rPr sz="1350" b="1" i="0">
+                <a:solidFill>
+                  <a:srgbClr val="1A1A1A"/>
+                </a:solidFill>
+                <a:latin typeface="Calibri"/>
+              </a:rPr>
+              <a:t>Widen coverage with a repeatable method</a:t>
+            </a:r>
+          </a:p>
+          <a:p>
+            <a:pPr>
+              <a:lnSpc>
+                <a:spcPct val="135000"/>
+              </a:lnSpc>
+              <a:spcBef>
+                <a:spcPts val="0"/>
+              </a:spcBef>
+              <a:spcAft>
+                <a:spcPts val="600"/>
+              </a:spcAft>
+            </a:pPr>
+            <a:r>
+              <a:rPr sz="1150" b="0" i="0">
+                <a:solidFill>
+                  <a:srgbClr val="4A4845"/>
+                </a:solidFill>
+                <a:latin typeface="Calibri"/>
+              </a:rPr>
+              <a:t>Move from manual searching to a defined collection process, and record why each candidate was included or excluded.</a:t>
+            </a:r>
+          </a:p>
+        </p:txBody>
+      </p:sp>
+      <p:sp>
+        <p:nvSpPr>
+          <p:cNvPr id="17" name="Rectangle 16"/>
+          <p:cNvSpPr/>
+          <p:nvPr/>
+        </p:nvSpPr>
+        <p:spPr>
+          <a:xfrm>
+            <a:off x="10289743" y="4407408"/>
+            <a:ext cx="1188720" cy="237744"/>
+          </a:xfrm>
+          <a:prstGeom prst="rect">
+            <a:avLst/>
+          </a:prstGeom>
+          <a:solidFill>
+            <a:srgbClr val="F4F2EE"/>
+          </a:solidFill>
+          <a:ln>
+            <a:noFill/>
+          </a:ln>
+          <a:effectLst/>
+        </p:spPr>
+        <p:style>
+          <a:lnRef idx="1">
+            <a:schemeClr val="accent1"/>
+          </a:lnRef>
+          <a:fillRef idx="3">
+            <a:schemeClr val="accent1"/>
+          </a:fillRef>
+          <a:effectRef idx="2">
+            <a:schemeClr val="accent1"/>
+          </a:effectRef>
+          <a:fontRef idx="minor">
+            <a:schemeClr val="lt1"/>
+          </a:fontRef>
+        </p:style>
+        <p:txBody>
+          <a:bodyPr rtlCol="0" anchor="ctr" lIns="64008" rIns="64008" tIns="0" bIns="0"/>
+          <a:lstStyle/>
+          <a:p>
+            <a:pPr algn="ctr"/>
+            <a:r>
+              <a:rPr sz="950" b="1">
+                <a:solidFill>
+                  <a:srgbClr val="7A7772"/>
+                </a:solidFill>
+                <a:latin typeface="Calibri"/>
+              </a:rPr>
+              <a:t>Two weeks</a:t>
+            </a:r>
+          </a:p>
+        </p:txBody>
+      </p:sp>
+      <p:sp>
+        <p:nvSpPr>
+          <p:cNvPr id="18" name="Oval 17"/>
+          <p:cNvSpPr/>
+          <p:nvPr/>
+        </p:nvSpPr>
+        <p:spPr>
+          <a:xfrm>
+            <a:off x="713232" y="5276088"/>
+            <a:ext cx="329184" cy="329184"/>
+          </a:xfrm>
+          <a:prstGeom prst="ellipse">
+            <a:avLst/>
+          </a:prstGeom>
+          <a:solidFill>
+            <a:srgbClr val="1F3A5F"/>
+          </a:solidFill>
+          <a:ln>
+            <a:noFill/>
+          </a:ln>
+          <a:effectLst/>
+        </p:spPr>
+        <p:style>
+          <a:lnRef idx="1">
+            <a:schemeClr val="accent1"/>
+          </a:lnRef>
+          <a:fillRef idx="3">
+            <a:schemeClr val="accent1"/>
+          </a:fillRef>
+          <a:effectRef idx="2">
+            <a:schemeClr val="accent1"/>
+          </a:effectRef>
+          <a:fontRef idx="minor">
+            <a:schemeClr val="lt1"/>
+          </a:fontRef>
+        </p:style>
+        <p:txBody>
+          <a:bodyPr rtlCol="0" anchor="ctr" lIns="0" rIns="0" tIns="0" bIns="0"/>
+          <a:lstStyle/>
+          <a:p>
+            <a:pPr algn="ctr"/>
+            <a:r>
+              <a:rPr sz="1200" b="1">
+                <a:solidFill>
+                  <a:srgbClr val="FFFFFF"/>
+                </a:solidFill>
+                <a:latin typeface="Calibri"/>
+              </a:rPr>
+              <a:t>5</a:t>
+            </a:r>
+          </a:p>
+        </p:txBody>
+      </p:sp>
+      <p:sp>
+        <p:nvSpPr>
+          <p:cNvPr id="19" name="TextBox 18"/>
+          <p:cNvSpPr txBox="1"/>
+          <p:nvPr/>
+        </p:nvSpPr>
+        <p:spPr>
+          <a:xfrm>
+            <a:off x="1207008" y="5221224"/>
+            <a:ext cx="8412480" cy="731520"/>
+          </a:xfrm>
+          <a:prstGeom prst="rect">
+            <a:avLst/>
+          </a:prstGeom>
+          <a:noFill/>
+        </p:spPr>
+        <p:txBody>
+          <a:bodyPr wrap="square" lIns="0" rIns="0" tIns="0" bIns="0" anchor="t">
+            <a:spAutoFit/>
+          </a:bodyPr>
+          <a:lstStyle/>
+          <a:p>
+            <a:pPr algn="l">
+              <a:lnSpc>
+                <a:spcPct val="135000"/>
+              </a:lnSpc>
+              <a:spcBef>
+                <a:spcPts val="0"/>
+              </a:spcBef>
+              <a:spcAft>
+                <a:spcPts val="300"/>
+              </a:spcAft>
+            </a:pPr>
+            <a:r>
+              <a:rPr sz="1350" b="1" i="0">
+                <a:solidFill>
+                  <a:srgbClr val="1A1A1A"/>
+                </a:solidFill>
+                <a:latin typeface="Calibri"/>
+              </a:rPr>
+              <a:t>Add company registry data</a:t>
+            </a:r>
+          </a:p>
+          <a:p>
+            <a:pPr>
+              <a:lnSpc>
+                <a:spcPct val="135000"/>
+              </a:lnSpc>
+              <a:spcBef>
+                <a:spcPts val="0"/>
+              </a:spcBef>
+              <a:spcAft>
+                <a:spcPts val="600"/>
+              </a:spcAft>
+            </a:pPr>
+            <a:r>
+              <a:rPr sz="1150" b="0" i="0">
+                <a:solidFill>
+                  <a:srgbClr val="4A4845"/>
+                </a:solidFill>
+                <a:latin typeface="Calibri"/>
+              </a:rPr>
+              <a:t>Tie each centre to its Indian legal entity, so the same company is never counted twice under two names.</a:t>
+            </a:r>
+          </a:p>
+        </p:txBody>
+      </p:sp>
+      <p:sp>
+        <p:nvSpPr>
+          <p:cNvPr id="20" name="Rectangle 19"/>
+          <p:cNvSpPr/>
+          <p:nvPr/>
+        </p:nvSpPr>
+        <p:spPr>
+          <a:xfrm>
+            <a:off x="10289743" y="5266944"/>
+            <a:ext cx="1188720" cy="237744"/>
+          </a:xfrm>
+          <a:prstGeom prst="rect">
+            <a:avLst/>
+          </a:prstGeom>
+          <a:solidFill>
+            <a:srgbClr val="F4F2EE"/>
+          </a:solidFill>
+          <a:ln>
+            <a:noFill/>
+          </a:ln>
+          <a:effectLst/>
+        </p:spPr>
+        <p:style>
+          <a:lnRef idx="1">
+            <a:schemeClr val="accent1"/>
+          </a:lnRef>
+          <a:fillRef idx="3">
+            <a:schemeClr val="accent1"/>
+          </a:fillRef>
+          <a:effectRef idx="2">
+            <a:schemeClr val="accent1"/>
+          </a:effectRef>
+          <a:fontRef idx="minor">
+            <a:schemeClr val="lt1"/>
+          </a:fontRef>
+        </p:style>
+        <p:txBody>
+          <a:bodyPr rtlCol="0" anchor="ctr" lIns="64008" rIns="64008" tIns="0" bIns="0"/>
+          <a:lstStyle/>
+          <a:p>
+            <a:pPr algn="ctr"/>
+            <a:r>
+              <a:rPr sz="950" b="1">
+                <a:solidFill>
+                  <a:srgbClr val="7A7772"/>
+                </a:solidFill>
+                <a:latin typeface="Calibri"/>
+              </a:rPr>
+              <a:t>Later</a:t>
+            </a:r>
+          </a:p>
+        </p:txBody>
+      </p:sp>
+      <p:sp>
+        <p:nvSpPr>
+          <p:cNvPr id="21" name="TextBox 20"/>
+          <p:cNvSpPr txBox="1"/>
+          <p:nvPr/>
+        </p:nvSpPr>
+        <p:spPr>
+          <a:xfrm>
+            <a:off x="713232" y="6382512"/>
+            <a:ext cx="10765231" cy="237744"/>
+          </a:xfrm>
+          <a:prstGeom prst="rect">
+            <a:avLst/>
+          </a:prstGeom>
+          <a:noFill/>
+        </p:spPr>
+        <p:txBody>
+          <a:bodyPr wrap="square" lIns="0" rIns="0" tIns="0" bIns="0" anchor="t">
+            <a:spAutoFit/>
+          </a:bodyPr>
+          <a:lstStyle/>
+          <a:p>
+            <a:pPr algn="l">
+              <a:lnSpc>
+                <a:spcPct val="135000"/>
+              </a:lnSpc>
+              <a:spcAft>
+                <a:spcPts val="0"/>
+              </a:spcAft>
+            </a:pPr>
+            <a:r>
+              <a:rPr sz="950" b="1">
+                <a:solidFill>
+                  <a:srgbClr val="7A7772"/>
+                </a:solidFill>
+                <a:latin typeface="Calibri"/>
+              </a:rPr>
+              <a:t>GCC Atlas</a:t>
+            </a:r>
+            <a:r>
+              <a:rPr sz="950" b="0">
+                <a:solidFill>
+                  <a:srgbClr val="7A7772"/>
+                </a:solidFill>
+                <a:latin typeface="Calibri"/>
+              </a:rPr>
+              <a:t>   ·   Next steps</a:t>
+            </a:r>
+          </a:p>
+        </p:txBody>
+      </p:sp>
+      <p:sp>
+        <p:nvSpPr>
+          <p:cNvPr id="22" name="TextBox 21"/>
+          <p:cNvSpPr txBox="1"/>
+          <p:nvPr/>
+        </p:nvSpPr>
+        <p:spPr>
+          <a:xfrm>
+            <a:off x="10564063" y="6382512"/>
+            <a:ext cx="914400" cy="237744"/>
+          </a:xfrm>
+          <a:prstGeom prst="rect">
+            <a:avLst/>
+          </a:prstGeom>
+          <a:noFill/>
+        </p:spPr>
+        <p:txBody>
+          <a:bodyPr wrap="square" lIns="0" rIns="0" tIns="0" bIns="0" anchor="t">
+            <a:spAutoFit/>
+          </a:bodyPr>
+          <a:lstStyle/>
+          <a:p>
+            <a:pPr algn="r">
+              <a:lnSpc>
+                <a:spcPct val="135000"/>
+              </a:lnSpc>
+              <a:spcBef>
+                <a:spcPts val="0"/>
+              </a:spcBef>
+              <a:spcAft>
+                <a:spcPts val="0"/>
+              </a:spcAft>
+            </a:pPr>
+            <a:r>
+              <a:rPr sz="950" b="0" i="0">
+                <a:solidFill>
+                  <a:srgbClr val="7A7772"/>
+                </a:solidFill>
+                <a:latin typeface="Calibri"/>
+              </a:rPr>
+              <a:t>18</a:t>
+            </a:r>
+          </a:p>
+        </p:txBody>
+      </p:sp>
+    </p:spTree>
+  </p:cSld>
+  <p:clrMapOvr>
+    <a:masterClrMapping/>
+  </p:clrMapOvr>
+</p:sld>
+</file>
+
+<file path=ppt/slides/slide19.xml><?xml version="1.0" encoding="utf-8"?>
+<p:sld xmlns:a="http://schemas.openxmlformats.org/drawingml/2006/main" xmlns:p="http://schemas.openxmlformats.org/presentationml/2006/main" xmlns:r="http://schemas.openxmlformats.org/officeDocument/2006/relationships">
+  <p:cSld>
+    <p:spTree>
+      <p:nvGrpSpPr>
+        <p:cNvPr id="1" name=""/>
+        <p:cNvGrpSpPr/>
+        <p:nvPr/>
+      </p:nvGrpSpPr>
+      <p:grpSpPr/>
+      <p:sp>
+        <p:nvSpPr>
+          <p:cNvPr id="2" name="Rectangle 1"/>
+          <p:cNvSpPr/>
+          <p:nvPr/>
+        </p:nvSpPr>
+        <p:spPr>
+          <a:xfrm>
+            <a:off x="0" y="0"/>
+            <a:ext cx="12191695" cy="6858000"/>
+          </a:xfrm>
+          <a:prstGeom prst="rect">
+            <a:avLst/>
+          </a:prstGeom>
+          <a:solidFill>
+            <a:srgbClr val="FFFFFF"/>
+          </a:solidFill>
+          <a:ln>
+            <a:noFill/>
+          </a:ln>
+          <a:effectLst/>
+        </p:spPr>
+        <p:style>
+          <a:lnRef idx="1">
+            <a:schemeClr val="accent1"/>
+          </a:lnRef>
+          <a:fillRef idx="3">
+            <a:schemeClr val="accent1"/>
+          </a:fillRef>
+          <a:effectRef idx="2">
+            <a:schemeClr val="accent1"/>
+          </a:effectRef>
+          <a:fontRef idx="minor">
+            <a:schemeClr val="lt1"/>
+          </a:fontRef>
+        </p:style>
+        <p:txBody>
+          <a:bodyPr rtlCol="0" anchor="ctr"/>
+          <a:lstStyle/>
+          <a:p>
+            <a:pPr algn="ctr"/>
+          </a:p>
+        </p:txBody>
+      </p:sp>
+      <p:sp>
+        <p:nvSpPr>
+          <p:cNvPr id="3" name="Rectangle 2"/>
+          <p:cNvSpPr/>
+          <p:nvPr/>
+        </p:nvSpPr>
+        <p:spPr>
+          <a:xfrm>
+            <a:off x="0" y="0"/>
+            <a:ext cx="118872" cy="6858000"/>
+          </a:xfrm>
+          <a:prstGeom prst="rect">
+            <a:avLst/>
+          </a:prstGeom>
+          <a:solidFill>
+            <a:srgbClr val="1F3A5F"/>
+          </a:solidFill>
+          <a:ln>
+            <a:noFill/>
+          </a:ln>
+          <a:effectLst/>
+        </p:spPr>
+        <p:style>
+          <a:lnRef idx="1">
+            <a:schemeClr val="accent1"/>
+          </a:lnRef>
+          <a:fillRef idx="3">
+            <a:schemeClr val="accent1"/>
+          </a:fillRef>
+          <a:effectRef idx="2">
+            <a:schemeClr val="accent1"/>
+          </a:effectRef>
+          <a:fontRef idx="minor">
+            <a:schemeClr val="lt1"/>
+          </a:fontRef>
+        </p:style>
+        <p:txBody>
+          <a:bodyPr rtlCol="0" anchor="ctr"/>
+          <a:lstStyle/>
+          <a:p>
+            <a:pPr algn="ctr"/>
+          </a:p>
+        </p:txBody>
+      </p:sp>
+      <p:sp>
+        <p:nvSpPr>
+          <p:cNvPr id="4" name="TextBox 3"/>
+          <p:cNvSpPr txBox="1"/>
+          <p:nvPr/>
+        </p:nvSpPr>
+        <p:spPr>
+          <a:xfrm>
+            <a:off x="1143000" y="1691640"/>
+            <a:ext cx="9509760" cy="914400"/>
+          </a:xfrm>
+          <a:prstGeom prst="rect">
+            <a:avLst/>
+          </a:prstGeom>
+          <a:noFill/>
+        </p:spPr>
+        <p:txBody>
+          <a:bodyPr wrap="square" lIns="0" rIns="0" tIns="0" bIns="0" anchor="t">
+            <a:spAutoFit/>
+          </a:bodyPr>
+          <a:lstStyle/>
+          <a:p>
+            <a:pPr algn="l">
+              <a:lnSpc>
+                <a:spcPct val="135000"/>
+              </a:lnSpc>
+              <a:spcBef>
+                <a:spcPts val="0"/>
+              </a:spcBef>
+              <a:spcAft>
+                <a:spcPts val="1600"/>
+              </a:spcAft>
+            </a:pPr>
+            <a:r>
+              <a:rPr sz="1500" b="1" i="0">
+                <a:solidFill>
+                  <a:srgbClr val="7A7772"/>
+                </a:solidFill>
+                <a:latin typeface="Calibri"/>
+              </a:rPr>
+              <a:t>The argument in one line</a:t>
+            </a:r>
+          </a:p>
+          <a:p>
+            <a:pPr>
+              <a:lnSpc>
+                <a:spcPct val="125000"/>
+              </a:lnSpc>
+              <a:spcBef>
+                <a:spcPts val="0"/>
+              </a:spcBef>
+              <a:spcAft>
+                <a:spcPts val="2000"/>
+              </a:spcAft>
+            </a:pPr>
+            <a:r>
+              <a:rPr sz="3000" b="0" i="0">
+                <a:solidFill>
+                  <a:srgbClr val="1A1A1A"/>
+                </a:solidFill>
+                <a:latin typeface="Georgia"/>
+              </a:rPr>
+              <a:t>This market does not lack information.
+It lacks information you can check.</a:t>
+            </a:r>
+          </a:p>
+        </p:txBody>
+      </p:sp>
+      <p:sp>
+        <p:nvSpPr>
+          <p:cNvPr id="5" name="Rectangle 4"/>
+          <p:cNvSpPr/>
+          <p:nvPr/>
+        </p:nvSpPr>
+        <p:spPr>
+          <a:xfrm>
+            <a:off x="1143000" y="3886200"/>
+            <a:ext cx="1828800" cy="11430"/>
+          </a:xfrm>
+          <a:prstGeom prst="rect">
+            <a:avLst/>
+          </a:prstGeom>
+          <a:solidFill>
+            <a:srgbClr val="1F3A5F"/>
+          </a:solidFill>
+          <a:ln>
+            <a:noFill/>
+          </a:ln>
+          <a:effectLst/>
+        </p:spPr>
+        <p:style>
+          <a:lnRef idx="1">
+            <a:schemeClr val="accent1"/>
+          </a:lnRef>
+          <a:fillRef idx="3">
+            <a:schemeClr val="accent1"/>
+          </a:fillRef>
+          <a:effectRef idx="2">
+            <a:schemeClr val="accent1"/>
+          </a:effectRef>
+          <a:fontRef idx="minor">
+            <a:schemeClr val="lt1"/>
+          </a:fontRef>
+        </p:style>
+        <p:txBody>
           <a:bodyPr rtlCol="0" anchor="ctr"/>
           <a:lstStyle/>
           <a:p>
@@ -10440,7 +12227,7 @@
                 </a:solidFill>
                 <a:latin typeface="Calibri"/>
               </a:rPr>
-              <a:t>18</a:t>
+              <a:t>19</a:t>
             </a:r>
           </a:p>
         </p:txBody>
